--- a/Medical_Specialty_Classification_Presentation_v4.pptx
+++ b/Medical_Specialty_Classification_Presentation_v4.pptx
@@ -15,7 +15,6 @@
     <p:sldId id="262" r:id="rId8"/>
     <p:sldId id="263" r:id="rId9"/>
     <p:sldId id="264" r:id="rId10"/>
-    <p:sldId id="265" r:id="rId11"/>
     <p:sldId id="266" r:id="rId12"/>
     <p:sldId id="267" r:id="rId13"/>
     <p:sldId id="268" r:id="rId14"/>
@@ -546,94 +545,6 @@
             <a:fld id="{F7021451-1387-4CA6-816F-3879F97B5CBC}" type="slidenum">
               <a:rPr lang="en-US"/>
               <a:t>1</a:t>
-            </a:fld>
-            <a:endParaRPr lang="en-US"/>
-          </a:p>
-        </p:txBody>
-      </p:sp>
-    </p:spTree>
-    <p:extLst>
-      <p:ext uri="{BB962C8B-B14F-4D97-AF65-F5344CB8AC3E}">
-        <p14:creationId xmlns:p14="http://schemas.microsoft.com/office/powerpoint/2010/main" val="1024086991"/>
-      </p:ext>
-    </p:extLst>
-  </p:cSld>
-  <p:clrMapOvr>
-    <a:masterClrMapping/>
-  </p:clrMapOvr>
-</p:notes>
-</file>
-
-<file path=ppt/notesSlides/notesSlide10.xml><?xml version="1.0" encoding="utf-8"?>
-<p:notes xmlns:a="http://schemas.openxmlformats.org/drawingml/2006/main" xmlns:r="http://schemas.openxmlformats.org/officeDocument/2006/relationships" xmlns:p="http://schemas.openxmlformats.org/presentationml/2006/main">
-  <p:cSld>
-    <p:spTree>
-      <p:nvGrpSpPr>
-        <p:cNvPr id="1" name=""/>
-        <p:cNvGrpSpPr/>
-        <p:nvPr/>
-      </p:nvGrpSpPr>
-      <p:grpSpPr>
-        <a:xfrm>
-          <a:off x="0" y="0"/>
-          <a:ext cx="0" cy="0"/>
-          <a:chOff x="0" y="0"/>
-          <a:chExt cx="0" cy="0"/>
-        </a:xfrm>
-      </p:grpSpPr>
-      <p:sp>
-        <p:nvSpPr>
-          <p:cNvPr id="2" name="Slide Image Placeholder 1"/>
-          <p:cNvSpPr>
-            <a:spLocks noGrp="1" noRot="1" noChangeAspect="1"/>
-          </p:cNvSpPr>
-          <p:nvPr>
-            <p:ph type="sldImg"/>
-          </p:nvPr>
-        </p:nvSpPr>
-        <p:spPr/>
-      </p:sp>
-      <p:sp>
-        <p:nvSpPr>
-          <p:cNvPr id="3" name="Notes Placeholder 2"/>
-          <p:cNvSpPr>
-            <a:spLocks noGrp="1"/>
-          </p:cNvSpPr>
-          <p:nvPr>
-            <p:ph type="body" idx="1"/>
-          </p:nvPr>
-        </p:nvSpPr>
-        <p:spPr/>
-        <p:txBody>
-          <a:bodyPr/>
-          <a:lstStyle/>
-          <a:p>
-            <a:r>
-              <a:rPr lang="en-US" dirty="0"/>
-              <a:t>Text preprocessing runs as eight sequential steps. First, records with missing transcriptions — 33 of them — are removed, and duplicate reports are verified absent. Then the text is lowercased, punctuation and special characters or digits are stripped, and the narrative is tokenized into individual words. Generic English stop-words are removed while preserving clinical vocabulary, and finally each token is lemmatized to its base form using the WordNet Lemmatizer — for example, 'suffers' becomes 'suffer'. This cleaned, normalized token stream is what feeds into TF-IDF vectorization next. Note that scaling and categorical encoding are not applicable here since we're working with raw text, not numeric tabular features.</a:t>
-            </a:r>
-            <a:endParaRPr lang="en-US" dirty="0"/>
-          </a:p>
-        </p:txBody>
-      </p:sp>
-      <p:sp>
-        <p:nvSpPr>
-          <p:cNvPr id="4" name="Slide Number Placeholder 3"/>
-          <p:cNvSpPr>
-            <a:spLocks noGrp="1"/>
-          </p:cNvSpPr>
-          <p:nvPr>
-            <p:ph type="sldNum" sz="quarter" idx="10"/>
-          </p:nvPr>
-        </p:nvSpPr>
-        <p:spPr/>
-        <p:txBody>
-          <a:bodyPr/>
-          <a:lstStyle/>
-          <a:p>
-            <a:fld id="{F7021451-1387-4CA6-816F-3879F97B5CBC}" type="slidenum">
-              <a:rPr lang="en-US"/>
-              <a:t>10</a:t>
             </a:fld>
             <a:endParaRPr lang="en-US"/>
           </a:p>
@@ -3232,7 +3143,7 @@
 
 <file path=ppt/slides/slide10.xml><?xml version="1.0" encoding="utf-8"?>
 <p:sld xmlns:a="http://schemas.openxmlformats.org/drawingml/2006/main" xmlns:r="http://schemas.openxmlformats.org/officeDocument/2006/relationships" xmlns:p="http://schemas.openxmlformats.org/presentationml/2006/main">
-  <p:cSld name="Slide 10">
+  <p:cSld name="Slide 9">
     <p:bg>
       <p:bgPr>
         <a:solidFill>
@@ -3313,7 +3224,7 @@
                 <a:ea typeface="Calibri" pitchFamily="34" charset="-122"/>
                 <a:cs typeface="Calibri" pitchFamily="34" charset="-120"/>
               </a:rPr>
-              <a:t>MCA MINI PROJECT | DATA PREPROCESSING</a:t>
+              <a:t>MCA MINI PROJECT | DATA ANALYSIS</a:t>
             </a:r>
             <a:endParaRPr lang="en-US" sz="1050" dirty="0"/>
           </a:p>
@@ -3352,7 +3263,7 @@
                 <a:ea typeface="Cambria" pitchFamily="34" charset="-122"/>
                 <a:cs typeface="Cambria" pitchFamily="34" charset="-120"/>
               </a:rPr>
-              <a:t>Clinical Text Data Cleaning Pipeline</a:t>
+              <a:t>EDA Insights &amp; Conclusions</a:t>
             </a:r>
             <a:endParaRPr lang="en-US" sz="2700" dirty="0"/>
           </a:p>
@@ -3466,64 +3377,25 @@
               </a:defRPr>
             </a:pPr>
             <a:r>
-              <a:t>Slide 11 of 21</a:t>
-            </a:r>
-          </a:p>
-        </p:txBody>
-      </p:sp>
-      <p:sp>
-        <p:nvSpPr>
-          <p:cNvPr id="8" name="Text 6"/>
-          <p:cNvSpPr txBox="1"/>
-          <p:nvPr/>
-        </p:nvSpPr>
-        <p:spPr>
-          <a:xfrm>
-            <a:off x="457200" y="1417320"/>
-            <a:ext cx="11247120" cy="365760"/>
-          </a:xfrm>
-          <a:prstGeom prst="rect">
-            <a:avLst/>
-          </a:prstGeom>
-          <a:noFill/>
-          <a:ln/>
-        </p:spPr>
-        <p:txBody>
-          <a:bodyPr wrap="square" lIns="0" tIns="0" rIns="0" bIns="0" rtlCol="0" anchor="ctr"/>
-          <a:lstStyle/>
-          <a:p>
-            <a:pPr indent="0" marL="0">
-              <a:buNone/>
-            </a:pPr>
-            <a:r>
-              <a:rPr lang="en-US" sz="1250" i="1" dirty="0">
-                <a:solidFill>
-                  <a:srgbClr val="5B6472"/>
-                </a:solidFill>
-                <a:latin typeface="Calibri" pitchFamily="34" charset="0"/>
-                <a:ea typeface="Calibri" pitchFamily="34" charset="-122"/>
-                <a:cs typeface="Calibri" pitchFamily="34" charset="-120"/>
-              </a:rPr>
-              <a:t>Eight sequential operations transform raw, noisy clinical dictations into clean input suitable for TF-IDF vectorization.</a:t>
-            </a:r>
-            <a:endParaRPr lang="en-US" sz="1250" dirty="0"/>
-          </a:p>
-        </p:txBody>
-      </p:sp>
-      <p:sp>
-        <p:nvSpPr>
-          <p:cNvPr id="9" name="Shape 7"/>
+              <a:t>Slide 10 of 20</a:t>
+            </a:r>
+          </a:p>
+        </p:txBody>
+      </p:sp>
+      <p:sp>
+        <p:nvSpPr>
+          <p:cNvPr id="8" name="Shape 6"/>
           <p:cNvSpPr/>
           <p:nvPr/>
         </p:nvSpPr>
         <p:spPr>
           <a:xfrm>
-            <a:off x="457200" y="1965960"/>
-            <a:ext cx="2679192" cy="1874520"/>
+            <a:off x="457200" y="1572768"/>
+            <a:ext cx="3639312" cy="2148840"/>
           </a:xfrm>
           <a:prstGeom prst="roundRect">
             <a:avLst>
-              <a:gd name="adj" fmla="val 4878"/>
+              <a:gd name="adj" fmla="val 3830"/>
             </a:avLst>
           </a:prstGeom>
           <a:solidFill>
@@ -3550,20 +3422,20 @@
       </p:sp>
       <p:sp>
         <p:nvSpPr>
-          <p:cNvPr id="10" name="Shape 8"/>
+          <p:cNvPr id="9" name="Shape 7"/>
           <p:cNvSpPr/>
           <p:nvPr/>
         </p:nvSpPr>
         <p:spPr>
           <a:xfrm>
-            <a:off x="621792" y="2130552"/>
-            <a:ext cx="457200" cy="457200"/>
+            <a:off x="640080" y="1755648"/>
+            <a:ext cx="548640" cy="548640"/>
           </a:xfrm>
           <a:prstGeom prst="ellipse">
             <a:avLst/>
           </a:prstGeom>
           <a:solidFill>
-            <a:srgbClr val="0E7C86"/>
+            <a:srgbClr val="6C4AB6"/>
           </a:solidFill>
           <a:ln/>
         </p:spPr>
@@ -3574,53 +3446,53 @@
       </p:sp>
       <p:sp>
         <p:nvSpPr>
+          <p:cNvPr id="10" name="Text 8"/>
+          <p:cNvSpPr txBox="1"/>
+          <p:nvPr/>
+        </p:nvSpPr>
+        <p:spPr>
+          <a:xfrm>
+            <a:off x="640080" y="1755648"/>
+            <a:ext cx="548640" cy="548640"/>
+          </a:xfrm>
+          <a:prstGeom prst="rect">
+            <a:avLst/>
+          </a:prstGeom>
+          <a:noFill/>
+          <a:ln/>
+        </p:spPr>
+        <p:txBody>
+          <a:bodyPr wrap="square" lIns="0" tIns="0" rIns="0" bIns="0" rtlCol="0" anchor="ctr"/>
+          <a:lstStyle/>
+          <a:p>
+            <a:pPr algn="ctr" indent="0" marL="0">
+              <a:buNone/>
+            </a:pPr>
+            <a:r>
+              <a:rPr lang="en-US" sz="2000" b="1" dirty="0">
+                <a:solidFill>
+                  <a:srgbClr val="FFFFFF"/>
+                </a:solidFill>
+                <a:latin typeface="Calibri" pitchFamily="34" charset="0"/>
+                <a:ea typeface="Calibri" pitchFamily="34" charset="-122"/>
+                <a:cs typeface="Calibri" pitchFamily="34" charset="-120"/>
+              </a:rPr>
+              <a:t>⚠</a:t>
+            </a:r>
+            <a:endParaRPr lang="en-US" sz="2000" dirty="0"/>
+          </a:p>
+        </p:txBody>
+      </p:sp>
+      <p:sp>
+        <p:nvSpPr>
           <p:cNvPr id="11" name="Text 9"/>
           <p:cNvSpPr txBox="1"/>
           <p:nvPr/>
         </p:nvSpPr>
         <p:spPr>
           <a:xfrm>
-            <a:off x="621792" y="2130552"/>
-            <a:ext cx="457200" cy="457200"/>
-          </a:xfrm>
-          <a:prstGeom prst="rect">
-            <a:avLst/>
-          </a:prstGeom>
-          <a:noFill/>
-          <a:ln/>
-        </p:spPr>
-        <p:txBody>
-          <a:bodyPr wrap="square" lIns="0" tIns="0" rIns="0" bIns="0" rtlCol="0" anchor="ctr"/>
-          <a:lstStyle/>
-          <a:p>
-            <a:pPr algn="ctr" indent="0" marL="0">
-              <a:buNone/>
-            </a:pPr>
-            <a:r>
-              <a:rPr lang="en-US" sz="1600" b="1" dirty="0">
-                <a:solidFill>
-                  <a:srgbClr val="FFFFFF"/>
-                </a:solidFill>
-                <a:latin typeface="Cambria" pitchFamily="34" charset="0"/>
-                <a:ea typeface="Cambria" pitchFamily="34" charset="-122"/>
-                <a:cs typeface="Cambria" pitchFamily="34" charset="-120"/>
-              </a:rPr>
-              <a:t>1</a:t>
-            </a:r>
-            <a:endParaRPr lang="en-US" sz="1600" dirty="0"/>
-          </a:p>
-        </p:txBody>
-      </p:sp>
-      <p:sp>
-        <p:nvSpPr>
-          <p:cNvPr id="12" name="Text 10"/>
-          <p:cNvSpPr txBox="1"/>
-          <p:nvPr/>
-        </p:nvSpPr>
-        <p:spPr>
-          <a:xfrm>
-            <a:off x="640080" y="2679192"/>
-            <a:ext cx="2313432" cy="502920"/>
+            <a:off x="1280160" y="1773936"/>
+            <a:ext cx="2633472" cy="548640"/>
           </a:xfrm>
           <a:prstGeom prst="rect">
             <a:avLst/>
@@ -3639,7 +3511,7 @@
               <a:buNone/>
             </a:pPr>
             <a:r>
-              <a:rPr lang="en-US" sz="1200" b="1" dirty="0">
+              <a:rPr lang="en-US" sz="1250" b="1" dirty="0">
                 <a:solidFill>
                   <a:srgbClr val="0B1F3A"/>
                 </a:solidFill>
@@ -3647,22 +3519,22 @@
                 <a:ea typeface="Cambria" pitchFamily="34" charset="-122"/>
                 <a:cs typeface="Cambria" pitchFamily="34" charset="-120"/>
               </a:rPr>
-              <a:t>Remove Missing Values</a:t>
-            </a:r>
-            <a:endParaRPr lang="en-US" sz="1200" dirty="0"/>
-          </a:p>
-        </p:txBody>
-      </p:sp>
-      <p:sp>
-        <p:nvSpPr>
-          <p:cNvPr id="13" name="Text 11"/>
-          <p:cNvSpPr txBox="1"/>
-          <p:nvPr/>
-        </p:nvSpPr>
-        <p:spPr>
-          <a:xfrm>
-            <a:off x="640080" y="3172968"/>
-            <a:ext cx="2313432" cy="594360"/>
+              <a:t>Severe Class Imbalance</a:t>
+            </a:r>
+            <a:endParaRPr lang="en-US" sz="1250" dirty="0"/>
+          </a:p>
+        </p:txBody>
+      </p:sp>
+      <p:sp>
+        <p:nvSpPr>
+          <p:cNvPr id="12" name="Text 10"/>
+          <p:cNvSpPr txBox="1"/>
+          <p:nvPr/>
+        </p:nvSpPr>
+        <p:spPr>
+          <a:xfrm>
+            <a:off x="713232" y="2414016"/>
+            <a:ext cx="3127248" cy="1188720"/>
           </a:xfrm>
           <a:prstGeom prst="rect">
             <a:avLst/>
@@ -3676,63 +3548,39 @@
           <a:p>
             <a:pPr indent="0" marL="0">
               <a:lnSpc>
-                <a:spcPct val="110000"/>
+                <a:spcPct val="115000"/>
               </a:lnSpc>
               <a:buNone/>
             </a:pPr>
             <a:r>
-              <a:rPr lang="en-US" sz="950" dirty="0">
-                <a:solidFill>
-                  <a:srgbClr val="5B6472"/>
+              <a:rPr lang="en-US" sz="1030" dirty="0">
+                <a:solidFill>
+                  <a:srgbClr val="16213E"/>
                 </a:solidFill>
                 <a:latin typeface="Calibri" pitchFamily="34" charset="0"/>
                 <a:ea typeface="Calibri" pitchFamily="34" charset="-122"/>
                 <a:cs typeface="Calibri" pitchFamily="34" charset="-120"/>
               </a:rPr>
-              <a:t>Drop 33 records with empty transcription</a:t>
-            </a:r>
-            <a:endParaRPr lang="en-US" sz="950" dirty="0"/>
-          </a:p>
-        </p:txBody>
-      </p:sp>
-      <p:sp>
-        <p:nvSpPr>
-          <p:cNvPr id="14" name="Shape 12"/>
+              <a:t>Surgery (1,103) vs. Autopsy (2) — requires stratified splitting &amp; ensemble voting.</a:t>
+            </a:r>
+            <a:endParaRPr lang="en-US" sz="1030" dirty="0"/>
+          </a:p>
+        </p:txBody>
+      </p:sp>
+      <p:sp>
+        <p:nvSpPr>
+          <p:cNvPr id="13" name="Shape 11"/>
           <p:cNvSpPr/>
           <p:nvPr/>
         </p:nvSpPr>
         <p:spPr>
           <a:xfrm>
-            <a:off x="3145536" y="2820924"/>
-            <a:ext cx="91440" cy="164592"/>
-          </a:xfrm>
-          <a:prstGeom prst="rightArrow">
-            <a:avLst/>
-          </a:prstGeom>
-          <a:solidFill>
-            <a:srgbClr val="E3E8F0"/>
-          </a:solidFill>
-          <a:ln/>
-        </p:spPr>
-        <p:txBody>
-          <a:bodyPr/>
-          <a:p/>
-        </p:txBody>
-      </p:sp>
-      <p:sp>
-        <p:nvSpPr>
-          <p:cNvPr id="15" name="Shape 13"/>
-          <p:cNvSpPr/>
-          <p:nvPr/>
-        </p:nvSpPr>
-        <p:spPr>
-          <a:xfrm>
-            <a:off x="3246120" y="1965960"/>
-            <a:ext cx="2679192" cy="1874520"/>
+            <a:off x="4233672" y="1572768"/>
+            <a:ext cx="3639312" cy="2148840"/>
           </a:xfrm>
           <a:prstGeom prst="roundRect">
             <a:avLst>
-              <a:gd name="adj" fmla="val 4878"/>
+              <a:gd name="adj" fmla="val 3830"/>
             </a:avLst>
           </a:prstGeom>
           <a:solidFill>
@@ -3759,14 +3607,14 @@
       </p:sp>
       <p:sp>
         <p:nvSpPr>
-          <p:cNvPr id="16" name="Shape 14"/>
+          <p:cNvPr id="14" name="Shape 12"/>
           <p:cNvSpPr/>
           <p:nvPr/>
         </p:nvSpPr>
         <p:spPr>
           <a:xfrm>
-            <a:off x="3410712" y="2130552"/>
-            <a:ext cx="457200" cy="457200"/>
+            <a:off x="4416552" y="1755648"/>
+            <a:ext cx="548640" cy="548640"/>
           </a:xfrm>
           <a:prstGeom prst="ellipse">
             <a:avLst/>
@@ -3783,14 +3631,14 @@
       </p:sp>
       <p:sp>
         <p:nvSpPr>
-          <p:cNvPr id="17" name="Text 15"/>
-          <p:cNvSpPr txBox="1"/>
-          <p:nvPr/>
-        </p:nvSpPr>
-        <p:spPr>
-          <a:xfrm>
-            <a:off x="3410712" y="2130552"/>
-            <a:ext cx="457200" cy="457200"/>
+          <p:cNvPr id="15" name="Text 13"/>
+          <p:cNvSpPr txBox="1"/>
+          <p:nvPr/>
+        </p:nvSpPr>
+        <p:spPr>
+          <a:xfrm>
+            <a:off x="4416552" y="1755648"/>
+            <a:ext cx="548640" cy="548640"/>
           </a:xfrm>
           <a:prstGeom prst="rect">
             <a:avLst/>
@@ -3806,30 +3654,30 @@
               <a:buNone/>
             </a:pPr>
             <a:r>
-              <a:rPr lang="en-US" sz="1600" b="1" dirty="0">
+              <a:rPr lang="en-US" sz="2000" b="1" dirty="0">
                 <a:solidFill>
                   <a:srgbClr val="FFFFFF"/>
                 </a:solidFill>
-                <a:latin typeface="Cambria" pitchFamily="34" charset="0"/>
-                <a:ea typeface="Cambria" pitchFamily="34" charset="-122"/>
-                <a:cs typeface="Cambria" pitchFamily="34" charset="-120"/>
-              </a:rPr>
-              <a:t>2</a:t>
-            </a:r>
-            <a:endParaRPr lang="en-US" sz="1600" dirty="0"/>
-          </a:p>
-        </p:txBody>
-      </p:sp>
-      <p:sp>
-        <p:nvSpPr>
-          <p:cNvPr id="18" name="Text 16"/>
-          <p:cNvSpPr txBox="1"/>
-          <p:nvPr/>
-        </p:nvSpPr>
-        <p:spPr>
-          <a:xfrm>
-            <a:off x="3429000" y="2679192"/>
-            <a:ext cx="2313432" cy="502920"/>
+                <a:latin typeface="Calibri" pitchFamily="34" charset="0"/>
+                <a:ea typeface="Calibri" pitchFamily="34" charset="-122"/>
+                <a:cs typeface="Calibri" pitchFamily="34" charset="-120"/>
+              </a:rPr>
+              <a:t>↔</a:t>
+            </a:r>
+            <a:endParaRPr lang="en-US" sz="2000" dirty="0"/>
+          </a:p>
+        </p:txBody>
+      </p:sp>
+      <p:sp>
+        <p:nvSpPr>
+          <p:cNvPr id="16" name="Text 14"/>
+          <p:cNvSpPr txBox="1"/>
+          <p:nvPr/>
+        </p:nvSpPr>
+        <p:spPr>
+          <a:xfrm>
+            <a:off x="5056632" y="1773936"/>
+            <a:ext cx="2633472" cy="548640"/>
           </a:xfrm>
           <a:prstGeom prst="rect">
             <a:avLst/>
@@ -3848,7 +3696,7 @@
               <a:buNone/>
             </a:pPr>
             <a:r>
-              <a:rPr lang="en-US" sz="1200" b="1" dirty="0">
+              <a:rPr lang="en-US" sz="1250" b="1" dirty="0">
                 <a:solidFill>
                   <a:srgbClr val="0B1F3A"/>
                 </a:solidFill>
@@ -3856,22 +3704,22 @@
                 <a:ea typeface="Cambria" pitchFamily="34" charset="-122"/>
                 <a:cs typeface="Cambria" pitchFamily="34" charset="-120"/>
               </a:rPr>
-              <a:t>Remove Duplicates</a:t>
-            </a:r>
-            <a:endParaRPr lang="en-US" sz="1200" dirty="0"/>
-          </a:p>
-        </p:txBody>
-      </p:sp>
-      <p:sp>
-        <p:nvSpPr>
-          <p:cNvPr id="19" name="Text 17"/>
-          <p:cNvSpPr txBox="1"/>
-          <p:nvPr/>
-        </p:nvSpPr>
-        <p:spPr>
-          <a:xfrm>
-            <a:off x="3429000" y="3172968"/>
-            <a:ext cx="2313432" cy="594360"/>
+              <a:t>Variable Text Length</a:t>
+            </a:r>
+            <a:endParaRPr lang="en-US" sz="1250" dirty="0"/>
+          </a:p>
+        </p:txBody>
+      </p:sp>
+      <p:sp>
+        <p:nvSpPr>
+          <p:cNvPr id="17" name="Text 15"/>
+          <p:cNvSpPr txBox="1"/>
+          <p:nvPr/>
+        </p:nvSpPr>
+        <p:spPr>
+          <a:xfrm>
+            <a:off x="4489704" y="2414016"/>
+            <a:ext cx="3127248" cy="1188720"/>
           </a:xfrm>
           <a:prstGeom prst="rect">
             <a:avLst/>
@@ -3885,63 +3733,39 @@
           <a:p>
             <a:pPr indent="0" marL="0">
               <a:lnSpc>
-                <a:spcPct val="110000"/>
+                <a:spcPct val="115000"/>
               </a:lnSpc>
               <a:buNone/>
             </a:pPr>
             <a:r>
-              <a:rPr lang="en-US" sz="950" dirty="0">
-                <a:solidFill>
-                  <a:srgbClr val="5B6472"/>
+              <a:rPr lang="en-US" sz="1030" dirty="0">
+                <a:solidFill>
+                  <a:srgbClr val="16213E"/>
                 </a:solidFill>
                 <a:latin typeface="Calibri" pitchFamily="34" charset="0"/>
                 <a:ea typeface="Calibri" pitchFamily="34" charset="-122"/>
                 <a:cs typeface="Calibri" pitchFamily="34" charset="-120"/>
               </a:rPr>
-              <a:t>Verify no duplicate clinical reports exist</a:t>
-            </a:r>
-            <a:endParaRPr lang="en-US" sz="950" dirty="0"/>
-          </a:p>
-        </p:txBody>
-      </p:sp>
-      <p:sp>
-        <p:nvSpPr>
-          <p:cNvPr id="20" name="Shape 18"/>
+              <a:t>200–3,000 words per report — needs TF-IDF with L2 normalization.</a:t>
+            </a:r>
+            <a:endParaRPr lang="en-US" sz="1030" dirty="0"/>
+          </a:p>
+        </p:txBody>
+      </p:sp>
+      <p:sp>
+        <p:nvSpPr>
+          <p:cNvPr id="18" name="Shape 16"/>
           <p:cNvSpPr/>
           <p:nvPr/>
         </p:nvSpPr>
         <p:spPr>
           <a:xfrm>
-            <a:off x="5934456" y="2820924"/>
-            <a:ext cx="91440" cy="164592"/>
-          </a:xfrm>
-          <a:prstGeom prst="rightArrow">
-            <a:avLst/>
-          </a:prstGeom>
-          <a:solidFill>
-            <a:srgbClr val="E3E8F0"/>
-          </a:solidFill>
-          <a:ln/>
-        </p:spPr>
-        <p:txBody>
-          <a:bodyPr/>
-          <a:p/>
-        </p:txBody>
-      </p:sp>
-      <p:sp>
-        <p:nvSpPr>
-          <p:cNvPr id="21" name="Shape 19"/>
-          <p:cNvSpPr/>
-          <p:nvPr/>
-        </p:nvSpPr>
-        <p:spPr>
-          <a:xfrm>
-            <a:off x="6035040" y="1965960"/>
-            <a:ext cx="2679192" cy="1874520"/>
+            <a:off x="8010144" y="1572768"/>
+            <a:ext cx="3639312" cy="2148840"/>
           </a:xfrm>
           <a:prstGeom prst="roundRect">
             <a:avLst>
-              <a:gd name="adj" fmla="val 4878"/>
+              <a:gd name="adj" fmla="val 3830"/>
             </a:avLst>
           </a:prstGeom>
           <a:solidFill>
@@ -3968,20 +3792,20 @@
       </p:sp>
       <p:sp>
         <p:nvSpPr>
-          <p:cNvPr id="22" name="Shape 20"/>
+          <p:cNvPr id="19" name="Shape 17"/>
           <p:cNvSpPr/>
           <p:nvPr/>
         </p:nvSpPr>
         <p:spPr>
           <a:xfrm>
-            <a:off x="6199632" y="2130552"/>
-            <a:ext cx="457200" cy="457200"/>
+            <a:off x="8193024" y="1755648"/>
+            <a:ext cx="548640" cy="548640"/>
           </a:xfrm>
           <a:prstGeom prst="ellipse">
             <a:avLst/>
           </a:prstGeom>
           <a:solidFill>
-            <a:srgbClr val="0E7C86"/>
+            <a:srgbClr val="13294B"/>
           </a:solidFill>
           <a:ln/>
         </p:spPr>
@@ -3992,14 +3816,14 @@
       </p:sp>
       <p:sp>
         <p:nvSpPr>
-          <p:cNvPr id="23" name="Text 21"/>
-          <p:cNvSpPr txBox="1"/>
-          <p:nvPr/>
-        </p:nvSpPr>
-        <p:spPr>
-          <a:xfrm>
-            <a:off x="6199632" y="2130552"/>
-            <a:ext cx="457200" cy="457200"/>
+          <p:cNvPr id="20" name="Text 18"/>
+          <p:cNvSpPr txBox="1"/>
+          <p:nvPr/>
+        </p:nvSpPr>
+        <p:spPr>
+          <a:xfrm>
+            <a:off x="8193024" y="1755648"/>
+            <a:ext cx="548640" cy="548640"/>
           </a:xfrm>
           <a:prstGeom prst="rect">
             <a:avLst/>
@@ -4015,30 +3839,30 @@
               <a:buNone/>
             </a:pPr>
             <a:r>
-              <a:rPr lang="en-US" sz="1600" b="1" dirty="0">
+              <a:rPr lang="en-US" sz="2000" b="1" dirty="0">
                 <a:solidFill>
                   <a:srgbClr val="FFFFFF"/>
                 </a:solidFill>
-                <a:latin typeface="Cambria" pitchFamily="34" charset="0"/>
-                <a:ea typeface="Cambria" pitchFamily="34" charset="-122"/>
-                <a:cs typeface="Cambria" pitchFamily="34" charset="-120"/>
-              </a:rPr>
-              <a:t>3</a:t>
-            </a:r>
-            <a:endParaRPr lang="en-US" sz="1600" dirty="0"/>
-          </a:p>
-        </p:txBody>
-      </p:sp>
-      <p:sp>
-        <p:nvSpPr>
-          <p:cNvPr id="24" name="Text 22"/>
-          <p:cNvSpPr txBox="1"/>
-          <p:nvPr/>
-        </p:nvSpPr>
-        <p:spPr>
-          <a:xfrm>
-            <a:off x="6217920" y="2679192"/>
-            <a:ext cx="2313432" cy="502920"/>
+                <a:latin typeface="Calibri" pitchFamily="34" charset="0"/>
+                <a:ea typeface="Calibri" pitchFamily="34" charset="-122"/>
+                <a:cs typeface="Calibri" pitchFamily="34" charset="-120"/>
+              </a:rPr>
+              <a:t>≡</a:t>
+            </a:r>
+            <a:endParaRPr lang="en-US" sz="2000" dirty="0"/>
+          </a:p>
+        </p:txBody>
+      </p:sp>
+      <p:sp>
+        <p:nvSpPr>
+          <p:cNvPr id="21" name="Text 19"/>
+          <p:cNvSpPr txBox="1"/>
+          <p:nvPr/>
+        </p:nvSpPr>
+        <p:spPr>
+          <a:xfrm>
+            <a:off x="8833104" y="1773936"/>
+            <a:ext cx="2633472" cy="548640"/>
           </a:xfrm>
           <a:prstGeom prst="rect">
             <a:avLst/>
@@ -4057,7 +3881,7 @@
               <a:buNone/>
             </a:pPr>
             <a:r>
-              <a:rPr lang="en-US" sz="1200" b="1" dirty="0">
+              <a:rPr lang="en-US" sz="1250" b="1" dirty="0">
                 <a:solidFill>
                   <a:srgbClr val="0B1F3A"/>
                 </a:solidFill>
@@ -4065,22 +3889,22 @@
                 <a:ea typeface="Cambria" pitchFamily="34" charset="-122"/>
                 <a:cs typeface="Cambria" pitchFamily="34" charset="-120"/>
               </a:rPr>
-              <a:t>Lowercasing</a:t>
-            </a:r>
-            <a:endParaRPr lang="en-US" sz="1200" dirty="0"/>
-          </a:p>
-        </p:txBody>
-      </p:sp>
-      <p:sp>
-        <p:nvSpPr>
-          <p:cNvPr id="25" name="Text 23"/>
-          <p:cNvSpPr txBox="1"/>
-          <p:nvPr/>
-        </p:nvSpPr>
-        <p:spPr>
-          <a:xfrm>
-            <a:off x="6217920" y="3172968"/>
-            <a:ext cx="2313432" cy="594360"/>
+              <a:t>High-Dimensional Text</a:t>
+            </a:r>
+            <a:endParaRPr lang="en-US" sz="1250" dirty="0"/>
+          </a:p>
+        </p:txBody>
+      </p:sp>
+      <p:sp>
+        <p:nvSpPr>
+          <p:cNvPr id="22" name="Text 20"/>
+          <p:cNvSpPr txBox="1"/>
+          <p:nvPr/>
+        </p:nvSpPr>
+        <p:spPr>
+          <a:xfrm>
+            <a:off x="8266176" y="2414016"/>
+            <a:ext cx="3127248" cy="1188720"/>
           </a:xfrm>
           <a:prstGeom prst="rect">
             <a:avLst/>
@@ -4094,63 +3918,39 @@
           <a:p>
             <a:pPr indent="0" marL="0">
               <a:lnSpc>
-                <a:spcPct val="110000"/>
+                <a:spcPct val="115000"/>
               </a:lnSpc>
               <a:buNone/>
             </a:pPr>
             <a:r>
-              <a:rPr lang="en-US" sz="950" dirty="0">
-                <a:solidFill>
-                  <a:srgbClr val="5B6472"/>
+              <a:rPr lang="en-US" sz="1030" dirty="0">
+                <a:solidFill>
+                  <a:srgbClr val="16213E"/>
                 </a:solidFill>
                 <a:latin typeface="Calibri" pitchFamily="34" charset="0"/>
                 <a:ea typeface="Calibri" pitchFamily="34" charset="-122"/>
                 <a:cs typeface="Calibri" pitchFamily="34" charset="-120"/>
               </a:rPr>
-              <a:t>Standardize character casing</a:t>
-            </a:r>
-            <a:endParaRPr lang="en-US" sz="950" dirty="0"/>
-          </a:p>
-        </p:txBody>
-      </p:sp>
-      <p:sp>
-        <p:nvSpPr>
-          <p:cNvPr id="26" name="Shape 24"/>
+              <a:t>Large free-text vocabulary → sparse, high-dimensional TF-IDF vectors.</a:t>
+            </a:r>
+            <a:endParaRPr lang="en-US" sz="1030" dirty="0"/>
+          </a:p>
+        </p:txBody>
+      </p:sp>
+      <p:sp>
+        <p:nvSpPr>
+          <p:cNvPr id="23" name="Shape 21"/>
           <p:cNvSpPr/>
           <p:nvPr/>
         </p:nvSpPr>
         <p:spPr>
           <a:xfrm>
-            <a:off x="8723376" y="2820924"/>
-            <a:ext cx="91440" cy="164592"/>
-          </a:xfrm>
-          <a:prstGeom prst="rightArrow">
-            <a:avLst/>
-          </a:prstGeom>
-          <a:solidFill>
-            <a:srgbClr val="E3E8F0"/>
-          </a:solidFill>
-          <a:ln/>
-        </p:spPr>
-        <p:txBody>
-          <a:bodyPr/>
-          <a:p/>
-        </p:txBody>
-      </p:sp>
-      <p:sp>
-        <p:nvSpPr>
-          <p:cNvPr id="27" name="Shape 25"/>
-          <p:cNvSpPr/>
-          <p:nvPr/>
-        </p:nvSpPr>
-        <p:spPr>
-          <a:xfrm>
-            <a:off x="8823960" y="1965960"/>
-            <a:ext cx="2679192" cy="1874520"/>
+            <a:off x="457200" y="3858768"/>
+            <a:ext cx="3639312" cy="2148840"/>
           </a:xfrm>
           <a:prstGeom prst="roundRect">
             <a:avLst>
-              <a:gd name="adj" fmla="val 4878"/>
+              <a:gd name="adj" fmla="val 3830"/>
             </a:avLst>
           </a:prstGeom>
           <a:solidFill>
@@ -4177,20 +3977,20 @@
       </p:sp>
       <p:sp>
         <p:nvSpPr>
-          <p:cNvPr id="28" name="Shape 26"/>
+          <p:cNvPr id="24" name="Shape 22"/>
           <p:cNvSpPr/>
           <p:nvPr/>
         </p:nvSpPr>
         <p:spPr>
           <a:xfrm>
-            <a:off x="8988552" y="2130552"/>
-            <a:ext cx="457200" cy="457200"/>
+            <a:off x="640080" y="4041648"/>
+            <a:ext cx="548640" cy="548640"/>
           </a:xfrm>
           <a:prstGeom prst="ellipse">
             <a:avLst/>
           </a:prstGeom>
           <a:solidFill>
-            <a:srgbClr val="0E7C86"/>
+            <a:srgbClr val="6C4AB6"/>
           </a:solidFill>
           <a:ln/>
         </p:spPr>
@@ -4201,14 +4001,14 @@
       </p:sp>
       <p:sp>
         <p:nvSpPr>
-          <p:cNvPr id="29" name="Text 27"/>
-          <p:cNvSpPr txBox="1"/>
-          <p:nvPr/>
-        </p:nvSpPr>
-        <p:spPr>
-          <a:xfrm>
-            <a:off x="8988552" y="2130552"/>
-            <a:ext cx="457200" cy="457200"/>
+          <p:cNvPr id="25" name="Text 23"/>
+          <p:cNvSpPr txBox="1"/>
+          <p:nvPr/>
+        </p:nvSpPr>
+        <p:spPr>
+          <a:xfrm>
+            <a:off x="640080" y="4041648"/>
+            <a:ext cx="548640" cy="548640"/>
           </a:xfrm>
           <a:prstGeom prst="rect">
             <a:avLst/>
@@ -4224,30 +4024,30 @@
               <a:buNone/>
             </a:pPr>
             <a:r>
-              <a:rPr lang="en-US" sz="1600" b="1" dirty="0">
+              <a:rPr lang="en-US" sz="2000" b="1" dirty="0">
                 <a:solidFill>
                   <a:srgbClr val="FFFFFF"/>
                 </a:solidFill>
-                <a:latin typeface="Cambria" pitchFamily="34" charset="0"/>
-                <a:ea typeface="Cambria" pitchFamily="34" charset="-122"/>
-                <a:cs typeface="Cambria" pitchFamily="34" charset="-120"/>
-              </a:rPr>
-              <a:t>4</a:t>
-            </a:r>
-            <a:endParaRPr lang="en-US" sz="1600" dirty="0"/>
-          </a:p>
-        </p:txBody>
-      </p:sp>
-      <p:sp>
-        <p:nvSpPr>
-          <p:cNvPr id="30" name="Text 28"/>
-          <p:cNvSpPr txBox="1"/>
-          <p:nvPr/>
-        </p:nvSpPr>
-        <p:spPr>
-          <a:xfrm>
-            <a:off x="9006840" y="2679192"/>
-            <a:ext cx="2313432" cy="502920"/>
+                <a:latin typeface="Calibri" pitchFamily="34" charset="0"/>
+                <a:ea typeface="Calibri" pitchFamily="34" charset="-122"/>
+                <a:cs typeface="Calibri" pitchFamily="34" charset="-120"/>
+              </a:rPr>
+              <a:t>⊘</a:t>
+            </a:r>
+            <a:endParaRPr lang="en-US" sz="2000" dirty="0"/>
+          </a:p>
+        </p:txBody>
+      </p:sp>
+      <p:sp>
+        <p:nvSpPr>
+          <p:cNvPr id="26" name="Text 24"/>
+          <p:cNvSpPr txBox="1"/>
+          <p:nvPr/>
+        </p:nvSpPr>
+        <p:spPr>
+          <a:xfrm>
+            <a:off x="1280160" y="4059936"/>
+            <a:ext cx="2633472" cy="548640"/>
           </a:xfrm>
           <a:prstGeom prst="rect">
             <a:avLst/>
@@ -4266,7 +4066,7 @@
               <a:buNone/>
             </a:pPr>
             <a:r>
-              <a:rPr lang="en-US" sz="1200" b="1" dirty="0">
+              <a:rPr lang="en-US" sz="1250" b="1" dirty="0">
                 <a:solidFill>
                   <a:srgbClr val="0B1F3A"/>
                 </a:solidFill>
@@ -4274,22 +4074,22 @@
                 <a:ea typeface="Cambria" pitchFamily="34" charset="-122"/>
                 <a:cs typeface="Cambria" pitchFamily="34" charset="-120"/>
               </a:rPr>
-              <a:t>Remove Punctuation</a:t>
-            </a:r>
-            <a:endParaRPr lang="en-US" sz="1200" dirty="0"/>
-          </a:p>
-        </p:txBody>
-      </p:sp>
-      <p:sp>
-        <p:nvSpPr>
-          <p:cNvPr id="31" name="Text 29"/>
-          <p:cNvSpPr txBox="1"/>
-          <p:nvPr/>
-        </p:nvSpPr>
-        <p:spPr>
-          <a:xfrm>
-            <a:off x="9006840" y="3172968"/>
-            <a:ext cx="2313432" cy="594360"/>
+              <a:t>Generic Vocabulary Noise</a:t>
+            </a:r>
+            <a:endParaRPr lang="en-US" sz="1250" dirty="0"/>
+          </a:p>
+        </p:txBody>
+      </p:sp>
+      <p:sp>
+        <p:nvSpPr>
+          <p:cNvPr id="27" name="Text 25"/>
+          <p:cNvSpPr txBox="1"/>
+          <p:nvPr/>
+        </p:nvSpPr>
+        <p:spPr>
+          <a:xfrm>
+            <a:off x="713232" y="4700016"/>
+            <a:ext cx="3127248" cy="1188720"/>
           </a:xfrm>
           <a:prstGeom prst="rect">
             <a:avLst/>
@@ -4303,39 +4103,39 @@
           <a:p>
             <a:pPr indent="0" marL="0">
               <a:lnSpc>
-                <a:spcPct val="110000"/>
+                <a:spcPct val="115000"/>
               </a:lnSpc>
               <a:buNone/>
             </a:pPr>
             <a:r>
-              <a:rPr lang="en-US" sz="950" dirty="0">
-                <a:solidFill>
-                  <a:srgbClr val="5B6472"/>
+              <a:rPr lang="en-US" sz="1030" dirty="0">
+                <a:solidFill>
+                  <a:srgbClr val="16213E"/>
                 </a:solidFill>
                 <a:latin typeface="Calibri" pitchFamily="34" charset="0"/>
                 <a:ea typeface="Calibri" pitchFamily="34" charset="-122"/>
                 <a:cs typeface="Calibri" pitchFamily="34" charset="-120"/>
               </a:rPr>
-              <a:t>Strip commas, periods, symbols</a:t>
-            </a:r>
-            <a:endParaRPr lang="en-US" sz="950" dirty="0"/>
-          </a:p>
-        </p:txBody>
-      </p:sp>
-      <p:sp>
-        <p:nvSpPr>
-          <p:cNvPr id="32" name="Shape 30"/>
+              <a:t>Common words dominate raw counts → IDF weighting needed to surface specialty terms.</a:t>
+            </a:r>
+            <a:endParaRPr lang="en-US" sz="1030" dirty="0"/>
+          </a:p>
+        </p:txBody>
+      </p:sp>
+      <p:sp>
+        <p:nvSpPr>
+          <p:cNvPr id="28" name="Shape 26"/>
           <p:cNvSpPr/>
           <p:nvPr/>
         </p:nvSpPr>
         <p:spPr>
           <a:xfrm>
-            <a:off x="457200" y="4160520"/>
-            <a:ext cx="2679192" cy="1874520"/>
+            <a:off x="4233672" y="3858768"/>
+            <a:ext cx="3639312" cy="2148840"/>
           </a:xfrm>
           <a:prstGeom prst="roundRect">
             <a:avLst>
-              <a:gd name="adj" fmla="val 4878"/>
+              <a:gd name="adj" fmla="val 3830"/>
             </a:avLst>
           </a:prstGeom>
           <a:solidFill>
@@ -4362,14 +4162,14 @@
       </p:sp>
       <p:sp>
         <p:nvSpPr>
-          <p:cNvPr id="33" name="Shape 31"/>
+          <p:cNvPr id="29" name="Shape 27"/>
           <p:cNvSpPr/>
           <p:nvPr/>
         </p:nvSpPr>
         <p:spPr>
           <a:xfrm>
-            <a:off x="621792" y="4325112"/>
-            <a:ext cx="457200" cy="457200"/>
+            <a:off x="4416552" y="4041648"/>
+            <a:ext cx="548640" cy="548640"/>
           </a:xfrm>
           <a:prstGeom prst="ellipse">
             <a:avLst/>
@@ -4386,14 +4186,14 @@
       </p:sp>
       <p:sp>
         <p:nvSpPr>
-          <p:cNvPr id="34" name="Text 32"/>
-          <p:cNvSpPr txBox="1"/>
-          <p:nvPr/>
-        </p:nvSpPr>
-        <p:spPr>
-          <a:xfrm>
-            <a:off x="621792" y="4325112"/>
-            <a:ext cx="457200" cy="457200"/>
+          <p:cNvPr id="30" name="Text 28"/>
+          <p:cNvSpPr txBox="1"/>
+          <p:nvPr/>
+        </p:nvSpPr>
+        <p:spPr>
+          <a:xfrm>
+            <a:off x="4416552" y="4041648"/>
+            <a:ext cx="548640" cy="548640"/>
           </a:xfrm>
           <a:prstGeom prst="rect">
             <a:avLst/>
@@ -4409,30 +4209,30 @@
               <a:buNone/>
             </a:pPr>
             <a:r>
-              <a:rPr lang="en-US" sz="1600" b="1" dirty="0">
+              <a:rPr lang="en-US" sz="2000" b="1" dirty="0">
                 <a:solidFill>
                   <a:srgbClr val="FFFFFF"/>
                 </a:solidFill>
-                <a:latin typeface="Cambria" pitchFamily="34" charset="0"/>
-                <a:ea typeface="Cambria" pitchFamily="34" charset="-122"/>
-                <a:cs typeface="Cambria" pitchFamily="34" charset="-120"/>
-              </a:rPr>
-              <a:t>5</a:t>
-            </a:r>
-            <a:endParaRPr lang="en-US" sz="1600" dirty="0"/>
-          </a:p>
-        </p:txBody>
-      </p:sp>
-      <p:sp>
-        <p:nvSpPr>
-          <p:cNvPr id="35" name="Text 33"/>
-          <p:cNvSpPr txBox="1"/>
-          <p:nvPr/>
-        </p:nvSpPr>
-        <p:spPr>
-          <a:xfrm>
-            <a:off x="640080" y="4873752"/>
-            <a:ext cx="2313432" cy="502920"/>
+                <a:latin typeface="Calibri" pitchFamily="34" charset="0"/>
+                <a:ea typeface="Calibri" pitchFamily="34" charset="-122"/>
+                <a:cs typeface="Calibri" pitchFamily="34" charset="-120"/>
+              </a:rPr>
+              <a:t>✗</a:t>
+            </a:r>
+            <a:endParaRPr lang="en-US" sz="2000" dirty="0"/>
+          </a:p>
+        </p:txBody>
+      </p:sp>
+      <p:sp>
+        <p:nvSpPr>
+          <p:cNvPr id="31" name="Text 29"/>
+          <p:cNvSpPr txBox="1"/>
+          <p:nvPr/>
+        </p:nvSpPr>
+        <p:spPr>
+          <a:xfrm>
+            <a:off x="5056632" y="4059936"/>
+            <a:ext cx="2633472" cy="548640"/>
           </a:xfrm>
           <a:prstGeom prst="rect">
             <a:avLst/>
@@ -4451,7 +4251,7 @@
               <a:buNone/>
             </a:pPr>
             <a:r>
-              <a:rPr lang="en-US" sz="1200" b="1" dirty="0">
+              <a:rPr lang="en-US" sz="1250" b="1" dirty="0">
                 <a:solidFill>
                   <a:srgbClr val="0B1F3A"/>
                 </a:solidFill>
@@ -4459,22 +4259,22 @@
                 <a:ea typeface="Cambria" pitchFamily="34" charset="-122"/>
                 <a:cs typeface="Cambria" pitchFamily="34" charset="-120"/>
               </a:rPr>
-              <a:t>Remove Special Characters</a:t>
-            </a:r>
-            <a:endParaRPr lang="en-US" sz="1200" dirty="0"/>
-          </a:p>
-        </p:txBody>
-      </p:sp>
-      <p:sp>
-        <p:nvSpPr>
-          <p:cNvPr id="36" name="Text 34"/>
-          <p:cNvSpPr txBox="1"/>
-          <p:nvPr/>
-        </p:nvSpPr>
-        <p:spPr>
-          <a:xfrm>
-            <a:off x="640080" y="5367528"/>
-            <a:ext cx="2313432" cy="594360"/>
+              <a:t>Sparse Keywords Field</a:t>
+            </a:r>
+            <a:endParaRPr lang="en-US" sz="1250" dirty="0"/>
+          </a:p>
+        </p:txBody>
+      </p:sp>
+      <p:sp>
+        <p:nvSpPr>
+          <p:cNvPr id="32" name="Text 30"/>
+          <p:cNvSpPr txBox="1"/>
+          <p:nvPr/>
+        </p:nvSpPr>
+        <p:spPr>
+          <a:xfrm>
+            <a:off x="4489704" y="4700016"/>
+            <a:ext cx="3127248" cy="1188720"/>
           </a:xfrm>
           <a:prstGeom prst="rect">
             <a:avLst/>
@@ -4488,63 +4288,39 @@
           <a:p>
             <a:pPr indent="0" marL="0">
               <a:lnSpc>
-                <a:spcPct val="110000"/>
+                <a:spcPct val="115000"/>
               </a:lnSpc>
               <a:buNone/>
             </a:pPr>
             <a:r>
-              <a:rPr lang="en-US" sz="950" dirty="0">
-                <a:solidFill>
-                  <a:srgbClr val="5B6472"/>
+              <a:rPr lang="en-US" sz="1030" dirty="0">
+                <a:solidFill>
+                  <a:srgbClr val="16213E"/>
                 </a:solidFill>
                 <a:latin typeface="Calibri" pitchFamily="34" charset="0"/>
                 <a:ea typeface="Calibri" pitchFamily="34" charset="-122"/>
                 <a:cs typeface="Calibri" pitchFamily="34" charset="-120"/>
               </a:rPr>
-              <a:t>Remove digits &amp; non-alphanumeric symbols</a:t>
-            </a:r>
-            <a:endParaRPr lang="en-US" sz="950" dirty="0"/>
-          </a:p>
-        </p:txBody>
-      </p:sp>
-      <p:sp>
-        <p:nvSpPr>
-          <p:cNvPr id="37" name="Shape 35"/>
+              <a:t>1,068 missing keyword entries — excluded from the primary feature set.</a:t>
+            </a:r>
+            <a:endParaRPr lang="en-US" sz="1030" dirty="0"/>
+          </a:p>
+        </p:txBody>
+      </p:sp>
+      <p:sp>
+        <p:nvSpPr>
+          <p:cNvPr id="33" name="Shape 31"/>
           <p:cNvSpPr/>
           <p:nvPr/>
         </p:nvSpPr>
         <p:spPr>
           <a:xfrm>
-            <a:off x="3145536" y="5015484"/>
-            <a:ext cx="91440" cy="164592"/>
-          </a:xfrm>
-          <a:prstGeom prst="rightArrow">
-            <a:avLst/>
-          </a:prstGeom>
-          <a:solidFill>
-            <a:srgbClr val="E3E8F0"/>
-          </a:solidFill>
-          <a:ln/>
-        </p:spPr>
-        <p:txBody>
-          <a:bodyPr/>
-          <a:p/>
-        </p:txBody>
-      </p:sp>
-      <p:sp>
-        <p:nvSpPr>
-          <p:cNvPr id="38" name="Shape 36"/>
-          <p:cNvSpPr/>
-          <p:nvPr/>
-        </p:nvSpPr>
-        <p:spPr>
-          <a:xfrm>
-            <a:off x="3246120" y="4160520"/>
-            <a:ext cx="2679192" cy="1874520"/>
+            <a:off x="8010144" y="3858768"/>
+            <a:ext cx="3639312" cy="2148840"/>
           </a:xfrm>
           <a:prstGeom prst="roundRect">
             <a:avLst>
-              <a:gd name="adj" fmla="val 4878"/>
+              <a:gd name="adj" fmla="val 3830"/>
             </a:avLst>
           </a:prstGeom>
           <a:solidFill>
@@ -4571,20 +4347,20 @@
       </p:sp>
       <p:sp>
         <p:nvSpPr>
-          <p:cNvPr id="39" name="Shape 37"/>
+          <p:cNvPr id="34" name="Shape 32"/>
           <p:cNvSpPr/>
           <p:nvPr/>
         </p:nvSpPr>
         <p:spPr>
           <a:xfrm>
-            <a:off x="3410712" y="4325112"/>
-            <a:ext cx="457200" cy="457200"/>
+            <a:off x="8193024" y="4041648"/>
+            <a:ext cx="548640" cy="548640"/>
           </a:xfrm>
           <a:prstGeom prst="ellipse">
             <a:avLst/>
           </a:prstGeom>
           <a:solidFill>
-            <a:srgbClr val="0E7C86"/>
+            <a:srgbClr val="13294B"/>
           </a:solidFill>
           <a:ln/>
         </p:spPr>
@@ -4595,14 +4371,14 @@
       </p:sp>
       <p:sp>
         <p:nvSpPr>
-          <p:cNvPr id="40" name="Text 38"/>
-          <p:cNvSpPr txBox="1"/>
-          <p:nvPr/>
-        </p:nvSpPr>
-        <p:spPr>
-          <a:xfrm>
-            <a:off x="3410712" y="4325112"/>
-            <a:ext cx="457200" cy="457200"/>
+          <p:cNvPr id="35" name="Text 33"/>
+          <p:cNvSpPr txBox="1"/>
+          <p:nvPr/>
+        </p:nvSpPr>
+        <p:spPr>
+          <a:xfrm>
+            <a:off x="8193024" y="4041648"/>
+            <a:ext cx="548640" cy="548640"/>
           </a:xfrm>
           <a:prstGeom prst="rect">
             <a:avLst/>
@@ -4618,30 +4394,30 @@
               <a:buNone/>
             </a:pPr>
             <a:r>
-              <a:rPr lang="en-US" sz="1600" b="1" dirty="0">
+              <a:rPr lang="en-US" sz="2000" b="1" dirty="0">
                 <a:solidFill>
                   <a:srgbClr val="FFFFFF"/>
                 </a:solidFill>
-                <a:latin typeface="Cambria" pitchFamily="34" charset="0"/>
-                <a:ea typeface="Cambria" pitchFamily="34" charset="-122"/>
-                <a:cs typeface="Cambria" pitchFamily="34" charset="-120"/>
-              </a:rPr>
-              <a:t>6</a:t>
-            </a:r>
-            <a:endParaRPr lang="en-US" sz="1600" dirty="0"/>
-          </a:p>
-        </p:txBody>
-      </p:sp>
-      <p:sp>
-        <p:nvSpPr>
-          <p:cNvPr id="41" name="Text 39"/>
-          <p:cNvSpPr txBox="1"/>
-          <p:nvPr/>
-        </p:nvSpPr>
-        <p:spPr>
-          <a:xfrm>
-            <a:off x="3429000" y="4873752"/>
-            <a:ext cx="2313432" cy="502920"/>
+                <a:latin typeface="Calibri" pitchFamily="34" charset="0"/>
+                <a:ea typeface="Calibri" pitchFamily="34" charset="-122"/>
+                <a:cs typeface="Calibri" pitchFamily="34" charset="-120"/>
+              </a:rPr>
+              <a:t>✓</a:t>
+            </a:r>
+            <a:endParaRPr lang="en-US" sz="2000" dirty="0"/>
+          </a:p>
+        </p:txBody>
+      </p:sp>
+      <p:sp>
+        <p:nvSpPr>
+          <p:cNvPr id="36" name="Text 34"/>
+          <p:cNvSpPr txBox="1"/>
+          <p:nvPr/>
+        </p:nvSpPr>
+        <p:spPr>
+          <a:xfrm>
+            <a:off x="8833104" y="4059936"/>
+            <a:ext cx="2633472" cy="548640"/>
           </a:xfrm>
           <a:prstGeom prst="rect">
             <a:avLst/>
@@ -4660,7 +4436,7 @@
               <a:buNone/>
             </a:pPr>
             <a:r>
-              <a:rPr lang="en-US" sz="1200" b="1" dirty="0">
+              <a:rPr lang="en-US" sz="1250" b="1" dirty="0">
                 <a:solidFill>
                   <a:srgbClr val="0B1F3A"/>
                 </a:solidFill>
@@ -4668,22 +4444,22 @@
                 <a:ea typeface="Cambria" pitchFamily="34" charset="-122"/>
                 <a:cs typeface="Cambria" pitchFamily="34" charset="-120"/>
               </a:rPr>
-              <a:t>Tokenization</a:t>
-            </a:r>
-            <a:endParaRPr lang="en-US" sz="1200" dirty="0"/>
-          </a:p>
-        </p:txBody>
-      </p:sp>
-      <p:sp>
-        <p:nvSpPr>
-          <p:cNvPr id="42" name="Text 40"/>
-          <p:cNvSpPr txBox="1"/>
-          <p:nvPr/>
-        </p:nvSpPr>
-        <p:spPr>
-          <a:xfrm>
-            <a:off x="3429000" y="5367528"/>
-            <a:ext cx="2313432" cy="594360"/>
+              <a:t>Multi-Metric Evaluation</a:t>
+            </a:r>
+            <a:endParaRPr lang="en-US" sz="1250" dirty="0"/>
+          </a:p>
+        </p:txBody>
+      </p:sp>
+      <p:sp>
+        <p:nvSpPr>
+          <p:cNvPr id="37" name="Text 35"/>
+          <p:cNvSpPr txBox="1"/>
+          <p:nvPr/>
+        </p:nvSpPr>
+        <p:spPr>
+          <a:xfrm>
+            <a:off x="8266176" y="4700016"/>
+            <a:ext cx="3127248" cy="1188720"/>
           </a:xfrm>
           <a:prstGeom prst="rect">
             <a:avLst/>
@@ -4697,440 +4473,22 @@
           <a:p>
             <a:pPr indent="0" marL="0">
               <a:lnSpc>
-                <a:spcPct val="110000"/>
+                <a:spcPct val="115000"/>
               </a:lnSpc>
               <a:buNone/>
             </a:pPr>
             <a:r>
-              <a:rPr lang="en-US" sz="950" dirty="0">
-                <a:solidFill>
-                  <a:srgbClr val="5B6472"/>
+              <a:rPr lang="en-US" sz="1030" dirty="0">
+                <a:solidFill>
+                  <a:srgbClr val="16213E"/>
                 </a:solidFill>
                 <a:latin typeface="Calibri" pitchFamily="34" charset="0"/>
                 <a:ea typeface="Calibri" pitchFamily="34" charset="-122"/>
                 <a:cs typeface="Calibri" pitchFamily="34" charset="-120"/>
               </a:rPr>
-              <a:t>Segment narratives into word tokens</a:t>
-            </a:r>
-            <a:endParaRPr lang="en-US" sz="950" dirty="0"/>
-          </a:p>
-        </p:txBody>
-      </p:sp>
-      <p:sp>
-        <p:nvSpPr>
-          <p:cNvPr id="43" name="Shape 41"/>
-          <p:cNvSpPr/>
-          <p:nvPr/>
-        </p:nvSpPr>
-        <p:spPr>
-          <a:xfrm>
-            <a:off x="5934456" y="5015484"/>
-            <a:ext cx="91440" cy="164592"/>
-          </a:xfrm>
-          <a:prstGeom prst="rightArrow">
-            <a:avLst/>
-          </a:prstGeom>
-          <a:solidFill>
-            <a:srgbClr val="E3E8F0"/>
-          </a:solidFill>
-          <a:ln/>
-        </p:spPr>
-        <p:txBody>
-          <a:bodyPr/>
-          <a:p/>
-        </p:txBody>
-      </p:sp>
-      <p:sp>
-        <p:nvSpPr>
-          <p:cNvPr id="44" name="Shape 42"/>
-          <p:cNvSpPr/>
-          <p:nvPr/>
-        </p:nvSpPr>
-        <p:spPr>
-          <a:xfrm>
-            <a:off x="6035040" y="4160520"/>
-            <a:ext cx="2679192" cy="1874520"/>
-          </a:xfrm>
-          <a:prstGeom prst="roundRect">
-            <a:avLst>
-              <a:gd name="adj" fmla="val 4878"/>
-            </a:avLst>
-          </a:prstGeom>
-          <a:solidFill>
-            <a:srgbClr val="FFFFFF"/>
-          </a:solidFill>
-          <a:ln w="12700">
-            <a:solidFill>
-              <a:srgbClr val="E3E8F0"/>
-            </a:solidFill>
-            <a:prstDash val="solid"/>
-          </a:ln>
-          <a:effectLst>
-            <a:outerShdw sx="100000" sy="100000" kx="0" ky="0" algn="bl" rotWithShape="0" blurRad="101600" dist="25400" dir="5400000">
-              <a:srgbClr val="1B2A4A">
-                <a:alpha val="16000"/>
-              </a:srgbClr>
-            </a:outerShdw>
-          </a:effectLst>
-        </p:spPr>
-        <p:txBody>
-          <a:bodyPr/>
-          <a:p/>
-        </p:txBody>
-      </p:sp>
-      <p:sp>
-        <p:nvSpPr>
-          <p:cNvPr id="45" name="Shape 43"/>
-          <p:cNvSpPr/>
-          <p:nvPr/>
-        </p:nvSpPr>
-        <p:spPr>
-          <a:xfrm>
-            <a:off x="6199632" y="4325112"/>
-            <a:ext cx="457200" cy="457200"/>
-          </a:xfrm>
-          <a:prstGeom prst="ellipse">
-            <a:avLst/>
-          </a:prstGeom>
-          <a:solidFill>
-            <a:srgbClr val="0E7C86"/>
-          </a:solidFill>
-          <a:ln/>
-        </p:spPr>
-        <p:txBody>
-          <a:bodyPr/>
-          <a:p/>
-        </p:txBody>
-      </p:sp>
-      <p:sp>
-        <p:nvSpPr>
-          <p:cNvPr id="46" name="Text 44"/>
-          <p:cNvSpPr txBox="1"/>
-          <p:nvPr/>
-        </p:nvSpPr>
-        <p:spPr>
-          <a:xfrm>
-            <a:off x="6199632" y="4325112"/>
-            <a:ext cx="457200" cy="457200"/>
-          </a:xfrm>
-          <a:prstGeom prst="rect">
-            <a:avLst/>
-          </a:prstGeom>
-          <a:noFill/>
-          <a:ln/>
-        </p:spPr>
-        <p:txBody>
-          <a:bodyPr wrap="square" lIns="0" tIns="0" rIns="0" bIns="0" rtlCol="0" anchor="ctr"/>
-          <a:lstStyle/>
-          <a:p>
-            <a:pPr algn="ctr" indent="0" marL="0">
-              <a:buNone/>
-            </a:pPr>
-            <a:r>
-              <a:rPr lang="en-US" sz="1600" b="1" dirty="0">
-                <a:solidFill>
-                  <a:srgbClr val="FFFFFF"/>
-                </a:solidFill>
-                <a:latin typeface="Cambria" pitchFamily="34" charset="0"/>
-                <a:ea typeface="Cambria" pitchFamily="34" charset="-122"/>
-                <a:cs typeface="Cambria" pitchFamily="34" charset="-120"/>
-              </a:rPr>
-              <a:t>7</a:t>
-            </a:r>
-            <a:endParaRPr lang="en-US" sz="1600" dirty="0"/>
-          </a:p>
-        </p:txBody>
-      </p:sp>
-      <p:sp>
-        <p:nvSpPr>
-          <p:cNvPr id="47" name="Text 45"/>
-          <p:cNvSpPr txBox="1"/>
-          <p:nvPr/>
-        </p:nvSpPr>
-        <p:spPr>
-          <a:xfrm>
-            <a:off x="6217920" y="4873752"/>
-            <a:ext cx="2313432" cy="502920"/>
-          </a:xfrm>
-          <a:prstGeom prst="rect">
-            <a:avLst/>
-          </a:prstGeom>
-          <a:noFill/>
-          <a:ln/>
-        </p:spPr>
-        <p:txBody>
-          <a:bodyPr wrap="square" lIns="0" tIns="0" rIns="0" bIns="0" rtlCol="0" anchor="t"/>
-          <a:lstStyle/>
-          <a:p>
-            <a:pPr indent="0" marL="0">
-              <a:lnSpc>
-                <a:spcPct val="100000"/>
-              </a:lnSpc>
-              <a:buNone/>
-            </a:pPr>
-            <a:r>
-              <a:rPr lang="en-US" sz="1200" b="1" dirty="0">
-                <a:solidFill>
-                  <a:srgbClr val="0B1F3A"/>
-                </a:solidFill>
-                <a:latin typeface="Cambria" pitchFamily="34" charset="0"/>
-                <a:ea typeface="Cambria" pitchFamily="34" charset="-122"/>
-                <a:cs typeface="Cambria" pitchFamily="34" charset="-120"/>
-              </a:rPr>
-              <a:t>Stop-Word Removal</a:t>
-            </a:r>
-            <a:endParaRPr lang="en-US" sz="1200" dirty="0"/>
-          </a:p>
-        </p:txBody>
-      </p:sp>
-      <p:sp>
-        <p:nvSpPr>
-          <p:cNvPr id="48" name="Text 46"/>
-          <p:cNvSpPr txBox="1"/>
-          <p:nvPr/>
-        </p:nvSpPr>
-        <p:spPr>
-          <a:xfrm>
-            <a:off x="6217920" y="5367528"/>
-            <a:ext cx="2313432" cy="594360"/>
-          </a:xfrm>
-          <a:prstGeom prst="rect">
-            <a:avLst/>
-          </a:prstGeom>
-          <a:noFill/>
-          <a:ln/>
-        </p:spPr>
-        <p:txBody>
-          <a:bodyPr wrap="square" lIns="0" tIns="0" rIns="0" bIns="0" rtlCol="0" anchor="t"/>
-          <a:lstStyle/>
-          <a:p>
-            <a:pPr indent="0" marL="0">
-              <a:lnSpc>
-                <a:spcPct val="110000"/>
-              </a:lnSpc>
-              <a:buNone/>
-            </a:pPr>
-            <a:r>
-              <a:rPr lang="en-US" sz="950" dirty="0">
-                <a:solidFill>
-                  <a:srgbClr val="5B6472"/>
-                </a:solidFill>
-                <a:latin typeface="Calibri" pitchFamily="34" charset="0"/>
-                <a:ea typeface="Calibri" pitchFamily="34" charset="-122"/>
-                <a:cs typeface="Calibri" pitchFamily="34" charset="-120"/>
-              </a:rPr>
-              <a:t>Filter generic words, preserve clinical terms</a:t>
-            </a:r>
-            <a:endParaRPr lang="en-US" sz="950" dirty="0"/>
-          </a:p>
-        </p:txBody>
-      </p:sp>
-      <p:sp>
-        <p:nvSpPr>
-          <p:cNvPr id="49" name="Shape 47"/>
-          <p:cNvSpPr/>
-          <p:nvPr/>
-        </p:nvSpPr>
-        <p:spPr>
-          <a:xfrm>
-            <a:off x="8723376" y="5015484"/>
-            <a:ext cx="91440" cy="164592"/>
-          </a:xfrm>
-          <a:prstGeom prst="rightArrow">
-            <a:avLst/>
-          </a:prstGeom>
-          <a:solidFill>
-            <a:srgbClr val="E3E8F0"/>
-          </a:solidFill>
-          <a:ln/>
-        </p:spPr>
-        <p:txBody>
-          <a:bodyPr/>
-          <a:p/>
-        </p:txBody>
-      </p:sp>
-      <p:sp>
-        <p:nvSpPr>
-          <p:cNvPr id="50" name="Shape 48"/>
-          <p:cNvSpPr/>
-          <p:nvPr/>
-        </p:nvSpPr>
-        <p:spPr>
-          <a:xfrm>
-            <a:off x="8823960" y="4160520"/>
-            <a:ext cx="2679192" cy="1874520"/>
-          </a:xfrm>
-          <a:prstGeom prst="roundRect">
-            <a:avLst>
-              <a:gd name="adj" fmla="val 4878"/>
-            </a:avLst>
-          </a:prstGeom>
-          <a:solidFill>
-            <a:srgbClr val="FFFFFF"/>
-          </a:solidFill>
-          <a:ln w="12700">
-            <a:solidFill>
-              <a:srgbClr val="E3E8F0"/>
-            </a:solidFill>
-            <a:prstDash val="solid"/>
-          </a:ln>
-          <a:effectLst>
-            <a:outerShdw sx="100000" sy="100000" kx="0" ky="0" algn="bl" rotWithShape="0" blurRad="101600" dist="25400" dir="5400000">
-              <a:srgbClr val="1B2A4A">
-                <a:alpha val="16000"/>
-              </a:srgbClr>
-            </a:outerShdw>
-          </a:effectLst>
-        </p:spPr>
-        <p:txBody>
-          <a:bodyPr/>
-          <a:p/>
-        </p:txBody>
-      </p:sp>
-      <p:sp>
-        <p:nvSpPr>
-          <p:cNvPr id="51" name="Shape 49"/>
-          <p:cNvSpPr/>
-          <p:nvPr/>
-        </p:nvSpPr>
-        <p:spPr>
-          <a:xfrm>
-            <a:off x="8988552" y="4325112"/>
-            <a:ext cx="457200" cy="457200"/>
-          </a:xfrm>
-          <a:prstGeom prst="ellipse">
-            <a:avLst/>
-          </a:prstGeom>
-          <a:solidFill>
-            <a:srgbClr val="0E7C86"/>
-          </a:solidFill>
-          <a:ln/>
-        </p:spPr>
-        <p:txBody>
-          <a:bodyPr/>
-          <a:p/>
-        </p:txBody>
-      </p:sp>
-      <p:sp>
-        <p:nvSpPr>
-          <p:cNvPr id="52" name="Text 50"/>
-          <p:cNvSpPr txBox="1"/>
-          <p:nvPr/>
-        </p:nvSpPr>
-        <p:spPr>
-          <a:xfrm>
-            <a:off x="8988552" y="4325112"/>
-            <a:ext cx="457200" cy="457200"/>
-          </a:xfrm>
-          <a:prstGeom prst="rect">
-            <a:avLst/>
-          </a:prstGeom>
-          <a:noFill/>
-          <a:ln/>
-        </p:spPr>
-        <p:txBody>
-          <a:bodyPr wrap="square" lIns="0" tIns="0" rIns="0" bIns="0" rtlCol="0" anchor="ctr"/>
-          <a:lstStyle/>
-          <a:p>
-            <a:pPr algn="ctr" indent="0" marL="0">
-              <a:buNone/>
-            </a:pPr>
-            <a:r>
-              <a:rPr lang="en-US" sz="1600" b="1" dirty="0">
-                <a:solidFill>
-                  <a:srgbClr val="FFFFFF"/>
-                </a:solidFill>
-                <a:latin typeface="Cambria" pitchFamily="34" charset="0"/>
-                <a:ea typeface="Cambria" pitchFamily="34" charset="-122"/>
-                <a:cs typeface="Cambria" pitchFamily="34" charset="-120"/>
-              </a:rPr>
-              <a:t>8</a:t>
-            </a:r>
-            <a:endParaRPr lang="en-US" sz="1600" dirty="0"/>
-          </a:p>
-        </p:txBody>
-      </p:sp>
-      <p:sp>
-        <p:nvSpPr>
-          <p:cNvPr id="53" name="Text 51"/>
-          <p:cNvSpPr txBox="1"/>
-          <p:nvPr/>
-        </p:nvSpPr>
-        <p:spPr>
-          <a:xfrm>
-            <a:off x="9006840" y="4873752"/>
-            <a:ext cx="2313432" cy="502920"/>
-          </a:xfrm>
-          <a:prstGeom prst="rect">
-            <a:avLst/>
-          </a:prstGeom>
-          <a:noFill/>
-          <a:ln/>
-        </p:spPr>
-        <p:txBody>
-          <a:bodyPr wrap="square" lIns="0" tIns="0" rIns="0" bIns="0" rtlCol="0" anchor="t"/>
-          <a:lstStyle/>
-          <a:p>
-            <a:pPr indent="0" marL="0">
-              <a:lnSpc>
-                <a:spcPct val="100000"/>
-              </a:lnSpc>
-              <a:buNone/>
-            </a:pPr>
-            <a:r>
-              <a:rPr lang="en-US" sz="1200" b="1" dirty="0">
-                <a:solidFill>
-                  <a:srgbClr val="0B1F3A"/>
-                </a:solidFill>
-                <a:latin typeface="Cambria" pitchFamily="34" charset="0"/>
-                <a:ea typeface="Cambria" pitchFamily="34" charset="-122"/>
-                <a:cs typeface="Cambria" pitchFamily="34" charset="-120"/>
-              </a:rPr>
-              <a:t>Lemmatization</a:t>
-            </a:r>
-            <a:endParaRPr lang="en-US" sz="1200" dirty="0"/>
-          </a:p>
-        </p:txBody>
-      </p:sp>
-      <p:sp>
-        <p:nvSpPr>
-          <p:cNvPr id="54" name="Text 52"/>
-          <p:cNvSpPr txBox="1"/>
-          <p:nvPr/>
-        </p:nvSpPr>
-        <p:spPr>
-          <a:xfrm>
-            <a:off x="9006840" y="5367528"/>
-            <a:ext cx="2313432" cy="594360"/>
-          </a:xfrm>
-          <a:prstGeom prst="rect">
-            <a:avLst/>
-          </a:prstGeom>
-          <a:noFill/>
-          <a:ln/>
-        </p:spPr>
-        <p:txBody>
-          <a:bodyPr wrap="square" lIns="0" tIns="0" rIns="0" bIns="0" rtlCol="0" anchor="t"/>
-          <a:lstStyle/>
-          <a:p>
-            <a:pPr indent="0" marL="0">
-              <a:lnSpc>
-                <a:spcPct val="110000"/>
-              </a:lnSpc>
-              <a:buNone/>
-            </a:pPr>
-            <a:r>
-              <a:rPr lang="en-US" sz="950" dirty="0">
-                <a:solidFill>
-                  <a:srgbClr val="5B6472"/>
-                </a:solidFill>
-                <a:latin typeface="Calibri" pitchFamily="34" charset="0"/>
-                <a:ea typeface="Calibri" pitchFamily="34" charset="-122"/>
-                <a:cs typeface="Calibri" pitchFamily="34" charset="-120"/>
-              </a:rPr>
-              <a:t>Map tokens to base form (WordNet Lemmatizer)</a:t>
-            </a:r>
-            <a:endParaRPr lang="en-US" sz="950" dirty="0"/>
+              <a:t>Accuracy alone is misleading under imbalance — use precision, recall &amp; F1.</a:t>
+            </a:r>
+            <a:endParaRPr lang="en-US" sz="1030" dirty="0"/>
           </a:p>
         </p:txBody>
       </p:sp>
@@ -5142,7 +4500,7 @@
 </p:sld>
 </file>
 
-<file path=ppt/slides/slide11.xml><?xml version="1.0" encoding="utf-8"?>
+<file path=ppt/slides/slide12.xml><?xml version="1.0" encoding="utf-8"?>
 <p:sld xmlns:a="http://schemas.openxmlformats.org/drawingml/2006/main" xmlns:r="http://schemas.openxmlformats.org/officeDocument/2006/relationships" xmlns:p="http://schemas.openxmlformats.org/presentationml/2006/main">
   <p:cSld name="Slide 11">
     <p:bg>
@@ -5378,7 +4736,7 @@
               </a:defRPr>
             </a:pPr>
             <a:r>
-              <a:t>Slide 12 of 21</a:t>
+              <a:t>Slide 11 of 20</a:t>
             </a:r>
           </a:p>
         </p:txBody>
@@ -6444,7 +5802,7 @@
 </p:sld>
 </file>
 
-<file path=ppt/slides/slide12.xml><?xml version="1.0" encoding="utf-8"?>
+<file path=ppt/slides/slide13.xml><?xml version="1.0" encoding="utf-8"?>
 <p:sld xmlns:a="http://schemas.openxmlformats.org/drawingml/2006/main" xmlns:r="http://schemas.openxmlformats.org/officeDocument/2006/relationships" xmlns:p="http://schemas.openxmlformats.org/presentationml/2006/main">
   <p:cSld name="Slide 12">
     <p:bg>
@@ -6680,7 +6038,7 @@
               </a:defRPr>
             </a:pPr>
             <a:r>
-              <a:t>Slide 13 of 21</a:t>
+              <a:t>Slide 12 of 20</a:t>
             </a:r>
           </a:p>
         </p:txBody>
@@ -8042,7 +7400,7 @@
 </p:sld>
 </file>
 
-<file path=ppt/slides/slide13.xml><?xml version="1.0" encoding="utf-8"?>
+<file path=ppt/slides/slide14.xml><?xml version="1.0" encoding="utf-8"?>
 <p:sld xmlns:a="http://schemas.openxmlformats.org/drawingml/2006/main" xmlns:r="http://schemas.openxmlformats.org/officeDocument/2006/relationships" xmlns:p="http://schemas.openxmlformats.org/presentationml/2006/main">
   <p:cSld name="Slide 13">
     <p:bg>
@@ -8278,7 +7636,7 @@
               </a:defRPr>
             </a:pPr>
             <a:r>
-              <a:t>Slide 14 of 21</a:t>
+              <a:t>Slide 13 of 20</a:t>
             </a:r>
           </a:p>
         </p:txBody>
@@ -9461,7 +8819,7 @@
 </p:sld>
 </file>
 
-<file path=ppt/slides/slide14.xml><?xml version="1.0" encoding="utf-8"?>
+<file path=ppt/slides/slide15.xml><?xml version="1.0" encoding="utf-8"?>
 <p:sld xmlns:a="http://schemas.openxmlformats.org/drawingml/2006/main" xmlns:r="http://schemas.openxmlformats.org/officeDocument/2006/relationships" xmlns:p="http://schemas.openxmlformats.org/presentationml/2006/main">
   <p:cSld name="Slide 14">
     <p:bg>
@@ -9677,7 +9035,7 @@
               </a:defRPr>
             </a:pPr>
             <a:r>
-              <a:t>Slide 15 of 21</a:t>
+              <a:t>Slide 14 of 20</a:t>
             </a:r>
           </a:p>
         </p:txBody>
@@ -10702,7 +10060,7 @@
 </p:sld>
 </file>
 
-<file path=ppt/slides/slide15.xml><?xml version="1.0" encoding="utf-8"?>
+<file path=ppt/slides/slide16.xml><?xml version="1.0" encoding="utf-8"?>
 <p:sld xmlns:a="http://schemas.openxmlformats.org/drawingml/2006/main" xmlns:r="http://schemas.openxmlformats.org/officeDocument/2006/relationships" xmlns:p="http://schemas.openxmlformats.org/presentationml/2006/main">
   <p:cSld name="Slide 15">
     <p:bg>
@@ -10918,7 +10276,7 @@
               </a:defRPr>
             </a:pPr>
             <a:r>
-              <a:t>Slide 16 of 21</a:t>
+              <a:t>Slide 15 of 20</a:t>
             </a:r>
           </a:p>
         </p:txBody>
@@ -11943,7 +11301,7 @@
 </p:sld>
 </file>
 
-<file path=ppt/slides/slide16.xml><?xml version="1.0" encoding="utf-8"?>
+<file path=ppt/slides/slide17.xml><?xml version="1.0" encoding="utf-8"?>
 <p:sld xmlns:a="http://schemas.openxmlformats.org/drawingml/2006/main" xmlns:r="http://schemas.openxmlformats.org/officeDocument/2006/relationships" xmlns:p="http://schemas.openxmlformats.org/presentationml/2006/main">
   <p:cSld name="Slide 16">
     <p:bg>
@@ -12159,7 +11517,7 @@
               </a:defRPr>
             </a:pPr>
             <a:r>
-              <a:t>Slide 17 of 21</a:t>
+              <a:t>Slide 16 of 20</a:t>
             </a:r>
           </a:p>
         </p:txBody>
@@ -12815,7 +12173,7 @@
 </p:sld>
 </file>
 
-<file path=ppt/slides/slide17.xml><?xml version="1.0" encoding="utf-8"?>
+<file path=ppt/slides/slide18.xml><?xml version="1.0" encoding="utf-8"?>
 <p:sld xmlns:a="http://schemas.openxmlformats.org/drawingml/2006/main" xmlns:r="http://schemas.openxmlformats.org/officeDocument/2006/relationships" xmlns:p="http://schemas.openxmlformats.org/presentationml/2006/main">
   <p:cSld name="Slide 17">
     <p:bg>
@@ -13051,7 +12409,7 @@
               </a:defRPr>
             </a:pPr>
             <a:r>
-              <a:t>Slide 18 of 21</a:t>
+              <a:t>Slide 17 of 20</a:t>
             </a:r>
           </a:p>
         </p:txBody>
@@ -13168,7 +12526,7 @@
 </p:sld>
 </file>
 
-<file path=ppt/slides/slide18.xml><?xml version="1.0" encoding="utf-8"?>
+<file path=ppt/slides/slide19.xml><?xml version="1.0" encoding="utf-8"?>
 <p:sld xmlns:a="http://schemas.openxmlformats.org/drawingml/2006/main" xmlns:r="http://schemas.openxmlformats.org/officeDocument/2006/relationships" xmlns:p="http://schemas.openxmlformats.org/presentationml/2006/main">
   <p:cSld name="Slide 18">
     <p:bg>
@@ -13335,7 +12693,7 @@
               </a:defRPr>
             </a:pPr>
             <a:r>
-              <a:t>Slide 19 of 21</a:t>
+              <a:t>Slide 18 of 20</a:t>
             </a:r>
           </a:p>
         </p:txBody>
@@ -13918,852 +13276,6 @@
             </a:pPr>
             <a:r>
               <a:t>MCA MINI PROJECT | PROGRESS &amp; ROADMAP</a:t>
-            </a:r>
-          </a:p>
-        </p:txBody>
-      </p:sp>
-    </p:spTree>
-  </p:cSld>
-  <p:clrMapOvr>
-    <a:masterClrMapping/>
-  </p:clrMapOvr>
-</p:sld>
-</file>
-
-<file path=ppt/slides/slide19.xml><?xml version="1.0" encoding="utf-8"?>
-<p:sld xmlns:a="http://schemas.openxmlformats.org/drawingml/2006/main" xmlns:r="http://schemas.openxmlformats.org/officeDocument/2006/relationships" xmlns:p="http://schemas.openxmlformats.org/presentationml/2006/main">
-  <p:cSld name="Slide 19">
-    <p:bg>
-      <p:bgPr>
-        <a:solidFill>
-          <a:srgbClr val="F6F8FB"/>
-        </a:solidFill>
-      </p:bgPr>
-    </p:bg>
-    <p:spTree>
-      <p:nvGrpSpPr>
-        <p:cNvPr id="1" name=""/>
-        <p:cNvGrpSpPr/>
-        <p:nvPr/>
-      </p:nvGrpSpPr>
-      <p:grpSpPr>
-        <a:xfrm>
-          <a:off x="0" y="0"/>
-          <a:ext cx="0" cy="0"/>
-          <a:chOff x="0" y="0"/>
-          <a:chExt cx="0" cy="0"/>
-        </a:xfrm>
-      </p:grpSpPr>
-      <p:sp>
-        <p:nvSpPr>
-          <p:cNvPr id="4" name="Text 2"/>
-          <p:cNvSpPr txBox="1"/>
-          <p:nvPr/>
-        </p:nvSpPr>
-        <p:spPr>
-          <a:xfrm>
-            <a:off x="457200" y="676656"/>
-            <a:ext cx="11247120" cy="658368"/>
-          </a:xfrm>
-          <a:prstGeom prst="rect">
-            <a:avLst/>
-          </a:prstGeom>
-          <a:noFill/>
-          <a:ln/>
-        </p:spPr>
-        <p:txBody>
-          <a:bodyPr wrap="square" lIns="0" tIns="0" rIns="0" bIns="0" rtlCol="0" anchor="t"/>
-          <a:lstStyle/>
-          <a:p>
-            <a:pPr>
-              <a:defRPr sz="2700" b="1">
-                <a:solidFill>
-                  <a:srgbClr val="0B1F3A"/>
-                </a:solidFill>
-                <a:latin typeface="Cambria"/>
-              </a:defRPr>
-            </a:pPr>
-            <a:r>
-              <a:t>Project Timeline &amp; Milestone Schedule</a:t>
-            </a:r>
-          </a:p>
-        </p:txBody>
-      </p:sp>
-      <p:sp>
-        <p:nvSpPr>
-          <p:cNvPr id="5" name="Text 3"/>
-          <p:cNvSpPr txBox="1"/>
-          <p:nvPr/>
-        </p:nvSpPr>
-        <p:spPr>
-          <a:xfrm>
-            <a:off x="457200" y="6519672"/>
-            <a:ext cx="4206240" cy="274320"/>
-          </a:xfrm>
-          <a:prstGeom prst="rect">
-            <a:avLst/>
-          </a:prstGeom>
-          <a:noFill/>
-          <a:ln/>
-        </p:spPr>
-        <p:txBody>
-          <a:bodyPr wrap="square" lIns="0" tIns="0" rIns="0" bIns="0" rtlCol="0" anchor="ctr"/>
-          <a:lstStyle/>
-          <a:p>
-            <a:pPr algn="l" indent="0" marL="0">
-              <a:buNone/>
-            </a:pPr>
-            <a:r>
-              <a:rPr lang="en-US" sz="900" dirty="0">
-                <a:solidFill>
-                  <a:srgbClr val="5B6472"/>
-                </a:solidFill>
-                <a:latin typeface="Calibri" pitchFamily="34" charset="0"/>
-                <a:ea typeface="Calibri" pitchFamily="34" charset="-122"/>
-                <a:cs typeface="Calibri" pitchFamily="34" charset="-120"/>
-              </a:rPr>
-              <a:t>Department of Computer Applications | MACE</a:t>
-            </a:r>
-            <a:endParaRPr lang="en-US" sz="900" dirty="0"/>
-          </a:p>
-        </p:txBody>
-      </p:sp>
-      <p:sp>
-        <p:nvSpPr>
-          <p:cNvPr id="6" name="Text 4"/>
-          <p:cNvSpPr txBox="1"/>
-          <p:nvPr/>
-        </p:nvSpPr>
-        <p:spPr>
-          <a:xfrm>
-            <a:off x="3657600" y="6519672"/>
-            <a:ext cx="4873752" cy="274320"/>
-          </a:xfrm>
-          <a:prstGeom prst="rect">
-            <a:avLst/>
-          </a:prstGeom>
-          <a:noFill/>
-          <a:ln/>
-        </p:spPr>
-        <p:txBody>
-          <a:bodyPr wrap="square" lIns="0" tIns="0" rIns="0" bIns="0" rtlCol="0" anchor="ctr"/>
-          <a:lstStyle/>
-          <a:p>
-            <a:pPr algn="ctr" indent="0" marL="0">
-              <a:buNone/>
-            </a:pPr>
-            <a:r>
-              <a:rPr lang="en-US" sz="900" dirty="0">
-                <a:solidFill>
-                  <a:srgbClr val="5B6472"/>
-                </a:solidFill>
-                <a:latin typeface="Calibri" pitchFamily="34" charset="0"/>
-                <a:ea typeface="Calibri" pitchFamily="34" charset="-122"/>
-                <a:cs typeface="Calibri" pitchFamily="34" charset="-120"/>
-              </a:rPr>
-              <a:t>Mar Athanasius College of Engineering, Kothamangalam</a:t>
-            </a:r>
-            <a:endParaRPr lang="en-US" sz="900" dirty="0"/>
-          </a:p>
-        </p:txBody>
-      </p:sp>
-      <p:sp>
-        <p:nvSpPr>
-          <p:cNvPr id="7" name="Text 5"/>
-          <p:cNvSpPr txBox="1"/>
-          <p:nvPr/>
-        </p:nvSpPr>
-        <p:spPr>
-          <a:xfrm>
-            <a:off x="9052560" y="6519672"/>
-            <a:ext cx="2679192" cy="274320"/>
-          </a:xfrm>
-          <a:prstGeom prst="rect">
-            <a:avLst/>
-          </a:prstGeom>
-          <a:noFill/>
-          <a:ln/>
-        </p:spPr>
-        <p:txBody>
-          <a:bodyPr wrap="square" lIns="0" tIns="0" rIns="0" bIns="0" rtlCol="0" anchor="ctr"/>
-          <a:lstStyle/>
-          <a:p>
-            <a:pPr>
-              <a:defRPr sz="900">
-                <a:solidFill>
-                  <a:srgbClr val="5B6472"/>
-                </a:solidFill>
-                <a:latin typeface="Calibri"/>
-              </a:defRPr>
-            </a:pPr>
-            <a:r>
-              <a:t>Slide 20 of 21</a:t>
-            </a:r>
-          </a:p>
-        </p:txBody>
-      </p:sp>
-      <p:sp>
-        <p:nvSpPr>
-          <p:cNvPr id="9" name="Rounded Rectangle 8"/>
-          <p:cNvSpPr/>
-          <p:nvPr/>
-        </p:nvSpPr>
-        <p:spPr>
-          <a:xfrm>
-            <a:off x="457200" y="1828800"/>
-            <a:ext cx="5440680" cy="4480560"/>
-          </a:xfrm>
-          <a:prstGeom prst="roundRect">
-            <a:avLst/>
-          </a:prstGeom>
-          <a:solidFill>
-            <a:srgbClr val="FFFFFF"/>
-          </a:solidFill>
-          <a:ln w="15240">
-            <a:solidFill>
-              <a:srgbClr val="E2E8F0"/>
-            </a:solidFill>
-          </a:ln>
-        </p:spPr>
-        <p:style>
-          <a:lnRef idx="1">
-            <a:schemeClr val="accent1"/>
-          </a:lnRef>
-          <a:fillRef idx="3">
-            <a:schemeClr val="accent1"/>
-          </a:fillRef>
-          <a:effectRef idx="2">
-            <a:schemeClr val="accent1"/>
-          </a:effectRef>
-          <a:fontRef idx="minor">
-            <a:schemeClr val="lt1"/>
-          </a:fontRef>
-        </p:style>
-        <p:txBody>
-          <a:bodyPr rtlCol="0" anchor="ctr" wrap="square" lIns="164592" rIns="164592" tIns="137160" bIns="109728"/>
-          <a:lstStyle/>
-          <a:p>
-            <a:pPr algn="ctr">
-              <a:spcAft>
-                <a:spcPts val="400"/>
-              </a:spcAft>
-              <a:defRPr sz="1200" b="1">
-                <a:solidFill>
-                  <a:srgbClr val="0E7C86"/>
-                </a:solidFill>
-                <a:latin typeface="Calibri"/>
-              </a:defRPr>
-            </a:pPr>
-            <a:r>
-              <a:t>PHASE 1: FOUNDATION &amp; SPRINT RELEASE I</a:t>
-            </a:r>
-          </a:p>
-          <a:p>
-            <a:pPr>
-              <a:spcAft>
-                <a:spcPts val="300"/>
-              </a:spcAft>
-            </a:pPr>
-            <a:r>
-              <a:rPr sz="950" b="1">
-                <a:solidFill>
-                  <a:srgbClr val="16A34A"/>
-                </a:solidFill>
-                <a:latin typeface="Calibri"/>
-              </a:rPr>
-              <a:t>✓  [17.07.2026]  Project Proposal &amp; Synopsis Approval by Guide
-</a:t>
-            </a:r>
-            <a:r>
-              <a:rPr sz="850" b="0">
-                <a:solidFill>
-                  <a:srgbClr val="334155"/>
-                </a:solidFill>
-                <a:latin typeface="Calibri"/>
-              </a:rPr>
-              <a:t>    Formal approval of project scope, objectives, and feasibility by faculty guide.</a:t>
-            </a:r>
-          </a:p>
-          <a:p>
-            <a:pPr>
-              <a:spcAft>
-                <a:spcPts val="300"/>
-              </a:spcAft>
-            </a:pPr>
-            <a:r>
-              <a:rPr sz="950" b="1">
-                <a:solidFill>
-                  <a:srgbClr val="16A34A"/>
-                </a:solidFill>
-                <a:latin typeface="Calibri"/>
-              </a:rPr>
-              <a:t>✓  [20.07.2026 – 21.07.2026]  Project Proposal Presentation
-</a:t>
-            </a:r>
-            <a:r>
-              <a:rPr sz="850" b="0">
-                <a:solidFill>
-                  <a:srgbClr val="334155"/>
-                </a:solidFill>
-                <a:latin typeface="Calibri"/>
-              </a:rPr>
-              <a:t>    Presented proposal before Department Project Approval Committee.</a:t>
-            </a:r>
-          </a:p>
-          <a:p>
-            <a:pPr>
-              <a:spcAft>
-                <a:spcPts val="300"/>
-              </a:spcAft>
-            </a:pPr>
-            <a:r>
-              <a:rPr sz="950" b="1">
-                <a:solidFill>
-                  <a:srgbClr val="16A34A"/>
-                </a:solidFill>
-                <a:latin typeface="Calibri"/>
-              </a:rPr>
-              <a:t>✓  [Weeks 1–2]  Dataset Collection &amp; Exploratory Data Analysis
-</a:t>
-            </a:r>
-            <a:r>
-              <a:rPr sz="850" b="0">
-                <a:solidFill>
-                  <a:srgbClr val="334155"/>
-                </a:solidFill>
-                <a:latin typeface="Calibri"/>
-              </a:rPr>
-              <a:t>    Acquired Kaggle MTSamples (4,999 records); audited nulls and generated 6 EDA plots.</a:t>
-            </a:r>
-          </a:p>
-          <a:p>
-            <a:pPr>
-              <a:spcAft>
-                <a:spcPts val="300"/>
-              </a:spcAft>
-            </a:pPr>
-            <a:r>
-              <a:rPr sz="950" b="1">
-                <a:solidFill>
-                  <a:srgbClr val="16A34A"/>
-                </a:solidFill>
-                <a:latin typeface="Calibri"/>
-              </a:rPr>
-              <a:t>✓  [Weeks 3–4]  Clinical Text Preprocessing Pipeline
-</a:t>
-            </a:r>
-            <a:r>
-              <a:rPr sz="850" b="0">
-                <a:solidFill>
-                  <a:srgbClr val="334155"/>
-                </a:solidFill>
-                <a:latin typeface="Calibri"/>
-              </a:rPr>
-              <a:t>    Designed 5-step sequence: Cleaning, Lowercasing, Tokenization, Stop-words, Lemmatization.</a:t>
-            </a:r>
-          </a:p>
-          <a:p>
-            <a:pPr>
-              <a:spcAft>
-                <a:spcPts val="300"/>
-              </a:spcAft>
-            </a:pPr>
-            <a:r>
-              <a:rPr sz="950" b="1">
-                <a:solidFill>
-                  <a:srgbClr val="16A34A"/>
-                </a:solidFill>
-                <a:latin typeface="Calibri"/>
-              </a:rPr>
-              <a:t>✓  [Week 5]  TF-IDF Vectorization Architecture
-</a:t>
-            </a:r>
-            <a:r>
-              <a:rPr sz="850" b="0">
-                <a:solidFill>
-                  <a:srgbClr val="334155"/>
-                </a:solidFill>
-                <a:latin typeface="Calibri"/>
-              </a:rPr>
-              <a:t>    Formulated unigram/bigram tokenization with sublinear scaling and sparse matrix layout.</a:t>
-            </a:r>
-          </a:p>
-          <a:p>
-            <a:pPr>
-              <a:spcAft>
-                <a:spcPts val="300"/>
-              </a:spcAft>
-            </a:pPr>
-            <a:r>
-              <a:rPr sz="950" b="1">
-                <a:solidFill>
-                  <a:srgbClr val="D97706"/>
-                </a:solidFill>
-                <a:latin typeface="Calibri"/>
-              </a:rPr>
-              <a:t>★  [08.09.2026]  First Project Presentation ★
-</a:t>
-            </a:r>
-            <a:r>
-              <a:rPr sz="850" b="0">
-                <a:solidFill>
-                  <a:srgbClr val="334155"/>
-                </a:solidFill>
-                <a:latin typeface="Calibri"/>
-              </a:rPr>
-              <a:t>    Current Milestone — Phase 1 Faculty Review &amp; Initial Progress Defense.</a:t>
-            </a:r>
-          </a:p>
-          <a:p>
-            <a:pPr>
-              <a:spcAft>
-                <a:spcPts val="300"/>
-              </a:spcAft>
-            </a:pPr>
-            <a:r>
-              <a:rPr sz="950" b="1">
-                <a:solidFill>
-                  <a:srgbClr val="D97706"/>
-                </a:solidFill>
-                <a:latin typeface="Calibri"/>
-              </a:rPr>
-              <a:t>★  [09.09.2026]  Sprint Release I ★
-</a:t>
-            </a:r>
-            <a:r>
-              <a:rPr sz="850" b="0">
-                <a:solidFill>
-                  <a:srgbClr val="334155"/>
-                </a:solidFill>
-                <a:latin typeface="Calibri"/>
-              </a:rPr>
-              <a:t>    Formal submission: EDA diagrams, architecture specifications, and Phase 1 report.</a:t>
-            </a:r>
-          </a:p>
-        </p:txBody>
-      </p:sp>
-      <p:sp>
-        <p:nvSpPr>
-          <p:cNvPr id="10" name="Rounded Rectangle 9"/>
-          <p:cNvSpPr/>
-          <p:nvPr/>
-        </p:nvSpPr>
-        <p:spPr>
-          <a:xfrm>
-            <a:off x="6217920" y="1828800"/>
-            <a:ext cx="5486400" cy="4480560"/>
-          </a:xfrm>
-          <a:prstGeom prst="roundRect">
-            <a:avLst/>
-          </a:prstGeom>
-          <a:solidFill>
-            <a:srgbClr val="FFFFFF"/>
-          </a:solidFill>
-          <a:ln w="15240">
-            <a:solidFill>
-              <a:srgbClr val="E2E8F0"/>
-            </a:solidFill>
-          </a:ln>
-        </p:spPr>
-        <p:style>
-          <a:lnRef idx="1">
-            <a:schemeClr val="accent1"/>
-          </a:lnRef>
-          <a:fillRef idx="3">
-            <a:schemeClr val="accent1"/>
-          </a:fillRef>
-          <a:effectRef idx="2">
-            <a:schemeClr val="accent1"/>
-          </a:effectRef>
-          <a:fontRef idx="minor">
-            <a:schemeClr val="lt1"/>
-          </a:fontRef>
-        </p:style>
-        <p:txBody>
-          <a:bodyPr rtlCol="0" anchor="ctr" wrap="square" lIns="164592" rIns="164592" tIns="137160" bIns="109728"/>
-          <a:lstStyle/>
-          <a:p>
-            <a:pPr algn="ctr">
-              <a:spcAft>
-                <a:spcPts val="400"/>
-              </a:spcAft>
-              <a:defRPr sz="1200" b="1">
-                <a:solidFill>
-                  <a:srgbClr val="2563EB"/>
-                </a:solidFill>
-                <a:latin typeface="Calibri"/>
-              </a:defRPr>
-            </a:pPr>
-            <a:r>
-              <a:t>PHASES 2 &amp; 3: MODEL BUILDING, ENSEMBLE &amp; DEPLOYMENT</a:t>
-            </a:r>
-          </a:p>
-          <a:p>
-            <a:pPr>
-              <a:spcAft>
-                <a:spcPts val="200"/>
-              </a:spcAft>
-            </a:pPr>
-            <a:r>
-              <a:rPr sz="919" b="1">
-                <a:solidFill>
-                  <a:srgbClr val="2563EB"/>
-                </a:solidFill>
-                <a:latin typeface="Calibri"/>
-              </a:rPr>
-              <a:t>→  [Week 6]  Candidate Model Training &amp; Baseline Evaluation
-</a:t>
-            </a:r>
-            <a:r>
-              <a:rPr sz="819" b="0">
-                <a:solidFill>
-                  <a:srgbClr val="334155"/>
-                </a:solidFill>
-                <a:latin typeface="Calibri"/>
-              </a:rPr>
-              <a:t>    Train SVM, Random Forest, Logistic Regression, and Multinomial Naive Bayes.</a:t>
-            </a:r>
-          </a:p>
-          <a:p>
-            <a:pPr>
-              <a:spcAft>
-                <a:spcPts val="200"/>
-              </a:spcAft>
-            </a:pPr>
-            <a:r>
-              <a:rPr sz="919" b="1">
-                <a:solidFill>
-                  <a:srgbClr val="D97706"/>
-                </a:solidFill>
-                <a:latin typeface="Calibri"/>
-              </a:rPr>
-              <a:t>★  [18.09.2026]  Sprint Release II ★
-</a:t>
-            </a:r>
-            <a:r>
-              <a:rPr sz="819" b="0">
-                <a:solidFill>
-                  <a:srgbClr val="334155"/>
-                </a:solidFill>
-                <a:latin typeface="Calibri"/>
-              </a:rPr>
-              <a:t>    Milestone release: Trained baseline classifiers and preliminary metrics.</a:t>
-            </a:r>
-          </a:p>
-          <a:p>
-            <a:pPr>
-              <a:spcAft>
-                <a:spcPts val="200"/>
-              </a:spcAft>
-            </a:pPr>
-            <a:r>
-              <a:rPr sz="919" b="1">
-                <a:solidFill>
-                  <a:srgbClr val="2563EB"/>
-                </a:solidFill>
-                <a:latin typeface="Calibri"/>
-              </a:rPr>
-              <a:t>→  [Week 7]  Hyperparameter Tuning &amp; Model Comparison
-</a:t>
-            </a:r>
-            <a:r>
-              <a:rPr sz="819" b="0">
-                <a:solidFill>
-                  <a:srgbClr val="334155"/>
-                </a:solidFill>
-                <a:latin typeface="Calibri"/>
-              </a:rPr>
-              <a:t>    Systematic tuning and comparative performance profiling across candidate estimators.</a:t>
-            </a:r>
-          </a:p>
-          <a:p>
-            <a:pPr>
-              <a:spcAft>
-                <a:spcPts val="200"/>
-              </a:spcAft>
-            </a:pPr>
-            <a:r>
-              <a:rPr sz="919" b="1">
-                <a:solidFill>
-                  <a:srgbClr val="2563EB"/>
-                </a:solidFill>
-                <a:latin typeface="Calibri"/>
-              </a:rPr>
-              <a:t>→  [Week 8]  Soft Voting Ensemble Implementation
-</a:t>
-            </a:r>
-            <a:r>
-              <a:rPr sz="819" b="0">
-                <a:solidFill>
-                  <a:srgbClr val="334155"/>
-                </a:solidFill>
-                <a:latin typeface="Calibri"/>
-              </a:rPr>
-              <a:t>    Construct soft voting ensemble; aggregate consensus probability distributions.</a:t>
-            </a:r>
-          </a:p>
-          <a:p>
-            <a:pPr>
-              <a:spcAft>
-                <a:spcPts val="200"/>
-              </a:spcAft>
-            </a:pPr>
-            <a:r>
-              <a:rPr sz="919" b="1">
-                <a:solidFill>
-                  <a:srgbClr val="D97706"/>
-                </a:solidFill>
-                <a:latin typeface="Calibri"/>
-              </a:rPr>
-              <a:t>★  [29.09.2026 – 30.09.2026]  Interim Project Presentation ★
-</a:t>
-            </a:r>
-            <a:r>
-              <a:rPr sz="819" b="0">
-                <a:solidFill>
-                  <a:srgbClr val="334155"/>
-                </a:solidFill>
-                <a:latin typeface="Calibri"/>
-              </a:rPr>
-              <a:t>    Progress review and working model demonstration before faculty committee.</a:t>
-            </a:r>
-          </a:p>
-          <a:p>
-            <a:pPr>
-              <a:spcAft>
-                <a:spcPts val="200"/>
-              </a:spcAft>
-            </a:pPr>
-            <a:r>
-              <a:rPr sz="919" b="1">
-                <a:solidFill>
-                  <a:srgbClr val="2563EB"/>
-                </a:solidFill>
-                <a:latin typeface="Calibri"/>
-              </a:rPr>
-              <a:t>→  [Week 9]  Flask Web Integration &amp; Serialization
-</a:t>
-            </a:r>
-            <a:r>
-              <a:rPr sz="819" b="0">
-                <a:solidFill>
-                  <a:srgbClr val="334155"/>
-                </a:solidFill>
-                <a:latin typeface="Calibri"/>
-              </a:rPr>
-              <a:t>    Serialize pipeline with Joblib; build interactive clinician UI for live inference.</a:t>
-            </a:r>
-          </a:p>
-          <a:p>
-            <a:pPr>
-              <a:spcAft>
-                <a:spcPts val="200"/>
-              </a:spcAft>
-            </a:pPr>
-            <a:r>
-              <a:rPr sz="919" b="1">
-                <a:solidFill>
-                  <a:srgbClr val="D97706"/>
-                </a:solidFill>
-                <a:latin typeface="Calibri"/>
-              </a:rPr>
-              <a:t>★  [09.10.2026]  Sprint Release III ★
-</a:t>
-            </a:r>
-            <a:r>
-              <a:rPr sz="819" b="0">
-                <a:solidFill>
-                  <a:srgbClr val="334155"/>
-                </a:solidFill>
-                <a:latin typeface="Calibri"/>
-              </a:rPr>
-              <a:t>    Integrated system release: Flask web application and serialized ensemble.</a:t>
-            </a:r>
-          </a:p>
-          <a:p>
-            <a:pPr>
-              <a:spcAft>
-                <a:spcPts val="200"/>
-              </a:spcAft>
-            </a:pPr>
-            <a:r>
-              <a:rPr sz="919" b="1">
-                <a:solidFill>
-                  <a:srgbClr val="2563EB"/>
-                </a:solidFill>
-                <a:latin typeface="Calibri"/>
-              </a:rPr>
-              <a:t>→  [Weeks 10–11]  Evaluation &amp; System Testing
-</a:t>
-            </a:r>
-            <a:r>
-              <a:rPr sz="819" b="0">
-                <a:solidFill>
-                  <a:srgbClr val="334155"/>
-                </a:solidFill>
-                <a:latin typeface="Calibri"/>
-              </a:rPr>
-              <a:t>    Multi-class metrics (Macro F1, Recall), confusion matrix analysis, and validation.</a:t>
-            </a:r>
-          </a:p>
-          <a:p>
-            <a:pPr>
-              <a:spcAft>
-                <a:spcPts val="200"/>
-              </a:spcAft>
-            </a:pPr>
-            <a:r>
-              <a:rPr sz="919" b="1">
-                <a:solidFill>
-                  <a:srgbClr val="D97706"/>
-                </a:solidFill>
-                <a:latin typeface="Calibri"/>
-              </a:rPr>
-              <a:t>★  [22.10.2026 – 23.10.2026]  Final Project Presentation ★
-</a:t>
-            </a:r>
-            <a:r>
-              <a:rPr sz="819" b="0">
-                <a:solidFill>
-                  <a:srgbClr val="334155"/>
-                </a:solidFill>
-                <a:latin typeface="Calibri"/>
-              </a:rPr>
-              <a:t>    Comprehensive final project defense before the examination board.</a:t>
-            </a:r>
-          </a:p>
-          <a:p>
-            <a:pPr>
-              <a:spcAft>
-                <a:spcPts val="200"/>
-              </a:spcAft>
-            </a:pPr>
-            <a:r>
-              <a:rPr sz="919" b="1">
-                <a:solidFill>
-                  <a:srgbClr val="D97706"/>
-                </a:solidFill>
-                <a:latin typeface="Calibri"/>
-              </a:rPr>
-              <a:t>★  [30.10.2026]  Final Report Submission ★
-</a:t>
-            </a:r>
-            <a:r>
-              <a:rPr sz="819" b="0">
-                <a:solidFill>
-                  <a:srgbClr val="334155"/>
-                </a:solidFill>
-                <a:latin typeface="Calibri"/>
-              </a:rPr>
-              <a:t>    Submission of finalized documentation, technical report, and source code.</a:t>
-            </a:r>
-          </a:p>
-        </p:txBody>
-      </p:sp>
-      <p:sp>
-        <p:nvSpPr>
-          <p:cNvPr id="11" name="Rounded Rectangle 10"/>
-          <p:cNvSpPr/>
-          <p:nvPr/>
-        </p:nvSpPr>
-        <p:spPr>
-          <a:xfrm>
-            <a:off x="457200" y="320040"/>
-            <a:ext cx="4206240" cy="292608"/>
-          </a:xfrm>
-          <a:prstGeom prst="roundRect">
-            <a:avLst/>
-          </a:prstGeom>
-          <a:solidFill>
-            <a:srgbClr val="0E7C86"/>
-          </a:solidFill>
-          <a:ln>
-            <a:noFill/>
-          </a:ln>
-        </p:spPr>
-        <p:style>
-          <a:lnRef idx="1">
-            <a:schemeClr val="accent1"/>
-          </a:lnRef>
-          <a:fillRef idx="3">
-            <a:schemeClr val="accent1"/>
-          </a:fillRef>
-          <a:effectRef idx="2">
-            <a:schemeClr val="accent1"/>
-          </a:effectRef>
-          <a:fontRef idx="minor">
-            <a:schemeClr val="lt1"/>
-          </a:fontRef>
-        </p:style>
-        <p:txBody>
-          <a:bodyPr rtlCol="0" anchor="ctr"/>
-          <a:lstStyle/>
-          <a:p>
-            <a:pPr algn="ctr">
-              <a:defRPr sz="1050" b="1">
-                <a:solidFill>
-                  <a:srgbClr val="FFFFFF"/>
-                </a:solidFill>
-                <a:latin typeface="Calibri"/>
-              </a:defRPr>
-            </a:pPr>
-            <a:r>
-              <a:t>MCA MINI PROJECT | PROJECT TIMELINE</a:t>
-            </a:r>
-          </a:p>
-        </p:txBody>
-      </p:sp>
-      <p:sp>
-        <p:nvSpPr>
-          <p:cNvPr id="12" name="Rounded Rectangle 11"/>
-          <p:cNvSpPr/>
-          <p:nvPr/>
-        </p:nvSpPr>
-        <p:spPr>
-          <a:xfrm>
-            <a:off x="457200" y="1371600"/>
-            <a:ext cx="11247120" cy="365760"/>
-          </a:xfrm>
-          <a:prstGeom prst="roundRect">
-            <a:avLst/>
-          </a:prstGeom>
-          <a:solidFill>
-            <a:srgbClr val="EEF6F6"/>
-          </a:solidFill>
-          <a:ln w="12700">
-            <a:solidFill>
-              <a:srgbClr val="0E7C86"/>
-            </a:solidFill>
-          </a:ln>
-        </p:spPr>
-        <p:style>
-          <a:lnRef idx="1">
-            <a:schemeClr val="accent1"/>
-          </a:lnRef>
-          <a:fillRef idx="3">
-            <a:schemeClr val="accent1"/>
-          </a:fillRef>
-          <a:effectRef idx="2">
-            <a:schemeClr val="accent1"/>
-          </a:effectRef>
-          <a:fontRef idx="minor">
-            <a:schemeClr val="lt1"/>
-          </a:fontRef>
-        </p:style>
-        <p:txBody>
-          <a:bodyPr rtlCol="0" anchor="ctr" tIns="54864" bIns="54864"/>
-          <a:lstStyle/>
-          <a:p>
-            <a:pPr algn="ctr">
-              <a:defRPr sz="1100" b="1">
-                <a:solidFill>
-                  <a:srgbClr val="0E7C86"/>
-                </a:solidFill>
-                <a:latin typeface="Calibri"/>
-              </a:defRPr>
-            </a:pPr>
-            <a:r>
-              <a:t>ACADEMIC TIMELINE &amp; PRESENTATION MILESTONES (SEMESTER 3 MCA MINI PROJECT)</a:t>
             </a:r>
           </a:p>
         </p:txBody>
@@ -15012,7 +13524,7 @@
               </a:defRPr>
             </a:pPr>
             <a:r>
-              <a:t>Slide 2 of 21</a:t>
+              <a:t>Slide 2 of 20</a:t>
             </a:r>
           </a:p>
         </p:txBody>
@@ -16157,6 +14669,852 @@
 </file>
 
 <file path=ppt/slides/slide20.xml><?xml version="1.0" encoding="utf-8"?>
+<p:sld xmlns:a="http://schemas.openxmlformats.org/drawingml/2006/main" xmlns:r="http://schemas.openxmlformats.org/officeDocument/2006/relationships" xmlns:p="http://schemas.openxmlformats.org/presentationml/2006/main">
+  <p:cSld name="Slide 19">
+    <p:bg>
+      <p:bgPr>
+        <a:solidFill>
+          <a:srgbClr val="F6F8FB"/>
+        </a:solidFill>
+      </p:bgPr>
+    </p:bg>
+    <p:spTree>
+      <p:nvGrpSpPr>
+        <p:cNvPr id="1" name=""/>
+        <p:cNvGrpSpPr/>
+        <p:nvPr/>
+      </p:nvGrpSpPr>
+      <p:grpSpPr>
+        <a:xfrm>
+          <a:off x="0" y="0"/>
+          <a:ext cx="0" cy="0"/>
+          <a:chOff x="0" y="0"/>
+          <a:chExt cx="0" cy="0"/>
+        </a:xfrm>
+      </p:grpSpPr>
+      <p:sp>
+        <p:nvSpPr>
+          <p:cNvPr id="4" name="Text 2"/>
+          <p:cNvSpPr txBox="1"/>
+          <p:nvPr/>
+        </p:nvSpPr>
+        <p:spPr>
+          <a:xfrm>
+            <a:off x="457200" y="676656"/>
+            <a:ext cx="11247120" cy="658368"/>
+          </a:xfrm>
+          <a:prstGeom prst="rect">
+            <a:avLst/>
+          </a:prstGeom>
+          <a:noFill/>
+          <a:ln/>
+        </p:spPr>
+        <p:txBody>
+          <a:bodyPr wrap="square" lIns="0" tIns="0" rIns="0" bIns="0" rtlCol="0" anchor="t"/>
+          <a:lstStyle/>
+          <a:p>
+            <a:pPr>
+              <a:defRPr sz="2700" b="1">
+                <a:solidFill>
+                  <a:srgbClr val="0B1F3A"/>
+                </a:solidFill>
+                <a:latin typeface="Cambria"/>
+              </a:defRPr>
+            </a:pPr>
+            <a:r>
+              <a:t>Project Timeline &amp; Milestone Schedule</a:t>
+            </a:r>
+          </a:p>
+        </p:txBody>
+      </p:sp>
+      <p:sp>
+        <p:nvSpPr>
+          <p:cNvPr id="5" name="Text 3"/>
+          <p:cNvSpPr txBox="1"/>
+          <p:nvPr/>
+        </p:nvSpPr>
+        <p:spPr>
+          <a:xfrm>
+            <a:off x="457200" y="6519672"/>
+            <a:ext cx="4206240" cy="274320"/>
+          </a:xfrm>
+          <a:prstGeom prst="rect">
+            <a:avLst/>
+          </a:prstGeom>
+          <a:noFill/>
+          <a:ln/>
+        </p:spPr>
+        <p:txBody>
+          <a:bodyPr wrap="square" lIns="0" tIns="0" rIns="0" bIns="0" rtlCol="0" anchor="ctr"/>
+          <a:lstStyle/>
+          <a:p>
+            <a:pPr algn="l" indent="0" marL="0">
+              <a:buNone/>
+            </a:pPr>
+            <a:r>
+              <a:rPr lang="en-US" sz="900" dirty="0">
+                <a:solidFill>
+                  <a:srgbClr val="5B6472"/>
+                </a:solidFill>
+                <a:latin typeface="Calibri" pitchFamily="34" charset="0"/>
+                <a:ea typeface="Calibri" pitchFamily="34" charset="-122"/>
+                <a:cs typeface="Calibri" pitchFamily="34" charset="-120"/>
+              </a:rPr>
+              <a:t>Department of Computer Applications | MACE</a:t>
+            </a:r>
+            <a:endParaRPr lang="en-US" sz="900" dirty="0"/>
+          </a:p>
+        </p:txBody>
+      </p:sp>
+      <p:sp>
+        <p:nvSpPr>
+          <p:cNvPr id="6" name="Text 4"/>
+          <p:cNvSpPr txBox="1"/>
+          <p:nvPr/>
+        </p:nvSpPr>
+        <p:spPr>
+          <a:xfrm>
+            <a:off x="3657600" y="6519672"/>
+            <a:ext cx="4873752" cy="274320"/>
+          </a:xfrm>
+          <a:prstGeom prst="rect">
+            <a:avLst/>
+          </a:prstGeom>
+          <a:noFill/>
+          <a:ln/>
+        </p:spPr>
+        <p:txBody>
+          <a:bodyPr wrap="square" lIns="0" tIns="0" rIns="0" bIns="0" rtlCol="0" anchor="ctr"/>
+          <a:lstStyle/>
+          <a:p>
+            <a:pPr algn="ctr" indent="0" marL="0">
+              <a:buNone/>
+            </a:pPr>
+            <a:r>
+              <a:rPr lang="en-US" sz="900" dirty="0">
+                <a:solidFill>
+                  <a:srgbClr val="5B6472"/>
+                </a:solidFill>
+                <a:latin typeface="Calibri" pitchFamily="34" charset="0"/>
+                <a:ea typeface="Calibri" pitchFamily="34" charset="-122"/>
+                <a:cs typeface="Calibri" pitchFamily="34" charset="-120"/>
+              </a:rPr>
+              <a:t>Mar Athanasius College of Engineering, Kothamangalam</a:t>
+            </a:r>
+            <a:endParaRPr lang="en-US" sz="900" dirty="0"/>
+          </a:p>
+        </p:txBody>
+      </p:sp>
+      <p:sp>
+        <p:nvSpPr>
+          <p:cNvPr id="7" name="Text 5"/>
+          <p:cNvSpPr txBox="1"/>
+          <p:nvPr/>
+        </p:nvSpPr>
+        <p:spPr>
+          <a:xfrm>
+            <a:off x="9052560" y="6519672"/>
+            <a:ext cx="2679192" cy="274320"/>
+          </a:xfrm>
+          <a:prstGeom prst="rect">
+            <a:avLst/>
+          </a:prstGeom>
+          <a:noFill/>
+          <a:ln/>
+        </p:spPr>
+        <p:txBody>
+          <a:bodyPr wrap="square" lIns="0" tIns="0" rIns="0" bIns="0" rtlCol="0" anchor="ctr"/>
+          <a:lstStyle/>
+          <a:p>
+            <a:pPr>
+              <a:defRPr sz="900">
+                <a:solidFill>
+                  <a:srgbClr val="5B6472"/>
+                </a:solidFill>
+                <a:latin typeface="Calibri"/>
+              </a:defRPr>
+            </a:pPr>
+            <a:r>
+              <a:t>Slide 19 of 20</a:t>
+            </a:r>
+          </a:p>
+        </p:txBody>
+      </p:sp>
+      <p:sp>
+        <p:nvSpPr>
+          <p:cNvPr id="9" name="Rounded Rectangle 8"/>
+          <p:cNvSpPr/>
+          <p:nvPr/>
+        </p:nvSpPr>
+        <p:spPr>
+          <a:xfrm>
+            <a:off x="457200" y="1828800"/>
+            <a:ext cx="5440680" cy="4480560"/>
+          </a:xfrm>
+          <a:prstGeom prst="roundRect">
+            <a:avLst/>
+          </a:prstGeom>
+          <a:solidFill>
+            <a:srgbClr val="FFFFFF"/>
+          </a:solidFill>
+          <a:ln w="15240">
+            <a:solidFill>
+              <a:srgbClr val="E2E8F0"/>
+            </a:solidFill>
+          </a:ln>
+        </p:spPr>
+        <p:style>
+          <a:lnRef idx="1">
+            <a:schemeClr val="accent1"/>
+          </a:lnRef>
+          <a:fillRef idx="3">
+            <a:schemeClr val="accent1"/>
+          </a:fillRef>
+          <a:effectRef idx="2">
+            <a:schemeClr val="accent1"/>
+          </a:effectRef>
+          <a:fontRef idx="minor">
+            <a:schemeClr val="lt1"/>
+          </a:fontRef>
+        </p:style>
+        <p:txBody>
+          <a:bodyPr rtlCol="0" anchor="ctr" wrap="square" lIns="164592" rIns="164592" tIns="137160" bIns="109728"/>
+          <a:lstStyle/>
+          <a:p>
+            <a:pPr algn="ctr">
+              <a:spcAft>
+                <a:spcPts val="400"/>
+              </a:spcAft>
+              <a:defRPr sz="1200" b="1">
+                <a:solidFill>
+                  <a:srgbClr val="0E7C86"/>
+                </a:solidFill>
+                <a:latin typeface="Calibri"/>
+              </a:defRPr>
+            </a:pPr>
+            <a:r>
+              <a:t>PHASE 1: FOUNDATION &amp; SPRINT RELEASE I</a:t>
+            </a:r>
+          </a:p>
+          <a:p>
+            <a:pPr>
+              <a:spcAft>
+                <a:spcPts val="300"/>
+              </a:spcAft>
+            </a:pPr>
+            <a:r>
+              <a:rPr sz="950" b="1">
+                <a:solidFill>
+                  <a:srgbClr val="16A34A"/>
+                </a:solidFill>
+                <a:latin typeface="Calibri"/>
+              </a:rPr>
+              <a:t>✓  [17.07.2026]  Project Proposal &amp; Synopsis Approval by Guide
+</a:t>
+            </a:r>
+            <a:r>
+              <a:rPr sz="850" b="0">
+                <a:solidFill>
+                  <a:srgbClr val="334155"/>
+                </a:solidFill>
+                <a:latin typeface="Calibri"/>
+              </a:rPr>
+              <a:t>    Formal approval of project scope, objectives, and feasibility by faculty guide.</a:t>
+            </a:r>
+          </a:p>
+          <a:p>
+            <a:pPr>
+              <a:spcAft>
+                <a:spcPts val="300"/>
+              </a:spcAft>
+            </a:pPr>
+            <a:r>
+              <a:rPr sz="950" b="1">
+                <a:solidFill>
+                  <a:srgbClr val="16A34A"/>
+                </a:solidFill>
+                <a:latin typeface="Calibri"/>
+              </a:rPr>
+              <a:t>✓  [20.07.2026 – 21.07.2026]  Project Proposal Presentation
+</a:t>
+            </a:r>
+            <a:r>
+              <a:rPr sz="850" b="0">
+                <a:solidFill>
+                  <a:srgbClr val="334155"/>
+                </a:solidFill>
+                <a:latin typeface="Calibri"/>
+              </a:rPr>
+              <a:t>    Presented proposal before Department Project Approval Committee.</a:t>
+            </a:r>
+          </a:p>
+          <a:p>
+            <a:pPr>
+              <a:spcAft>
+                <a:spcPts val="300"/>
+              </a:spcAft>
+            </a:pPr>
+            <a:r>
+              <a:rPr sz="950" b="1">
+                <a:solidFill>
+                  <a:srgbClr val="16A34A"/>
+                </a:solidFill>
+                <a:latin typeface="Calibri"/>
+              </a:rPr>
+              <a:t>✓  [Weeks 1–2]  Dataset Collection &amp; Exploratory Data Analysis
+</a:t>
+            </a:r>
+            <a:r>
+              <a:rPr sz="850" b="0">
+                <a:solidFill>
+                  <a:srgbClr val="334155"/>
+                </a:solidFill>
+                <a:latin typeface="Calibri"/>
+              </a:rPr>
+              <a:t>    Acquired Kaggle MTSamples (4,999 records); audited nulls and generated 6 EDA plots.</a:t>
+            </a:r>
+          </a:p>
+          <a:p>
+            <a:pPr>
+              <a:spcAft>
+                <a:spcPts val="300"/>
+              </a:spcAft>
+            </a:pPr>
+            <a:r>
+              <a:rPr sz="950" b="1">
+                <a:solidFill>
+                  <a:srgbClr val="16A34A"/>
+                </a:solidFill>
+                <a:latin typeface="Calibri"/>
+              </a:rPr>
+              <a:t>✓  [Weeks 3–4]  Clinical Text Preprocessing Pipeline
+</a:t>
+            </a:r>
+            <a:r>
+              <a:rPr sz="850" b="0">
+                <a:solidFill>
+                  <a:srgbClr val="334155"/>
+                </a:solidFill>
+                <a:latin typeface="Calibri"/>
+              </a:rPr>
+              <a:t>    Designed 5-step sequence: Cleaning, Lowercasing, Tokenization, Stop-words, Lemmatization.</a:t>
+            </a:r>
+          </a:p>
+          <a:p>
+            <a:pPr>
+              <a:spcAft>
+                <a:spcPts val="300"/>
+              </a:spcAft>
+            </a:pPr>
+            <a:r>
+              <a:rPr sz="950" b="1">
+                <a:solidFill>
+                  <a:srgbClr val="16A34A"/>
+                </a:solidFill>
+                <a:latin typeface="Calibri"/>
+              </a:rPr>
+              <a:t>✓  [Week 5]  TF-IDF Vectorization Architecture
+</a:t>
+            </a:r>
+            <a:r>
+              <a:rPr sz="850" b="0">
+                <a:solidFill>
+                  <a:srgbClr val="334155"/>
+                </a:solidFill>
+                <a:latin typeface="Calibri"/>
+              </a:rPr>
+              <a:t>    Formulated unigram/bigram tokenization with sublinear scaling and sparse matrix layout.</a:t>
+            </a:r>
+          </a:p>
+          <a:p>
+            <a:pPr>
+              <a:spcAft>
+                <a:spcPts val="300"/>
+              </a:spcAft>
+            </a:pPr>
+            <a:r>
+              <a:rPr sz="950" b="1">
+                <a:solidFill>
+                  <a:srgbClr val="D97706"/>
+                </a:solidFill>
+                <a:latin typeface="Calibri"/>
+              </a:rPr>
+              <a:t>★  [08.09.2026]  First Project Presentation ★
+</a:t>
+            </a:r>
+            <a:r>
+              <a:rPr sz="850" b="0">
+                <a:solidFill>
+                  <a:srgbClr val="334155"/>
+                </a:solidFill>
+                <a:latin typeface="Calibri"/>
+              </a:rPr>
+              <a:t>    Current Milestone — Phase 1 Faculty Review &amp; Initial Progress Defense.</a:t>
+            </a:r>
+          </a:p>
+          <a:p>
+            <a:pPr>
+              <a:spcAft>
+                <a:spcPts val="300"/>
+              </a:spcAft>
+            </a:pPr>
+            <a:r>
+              <a:rPr sz="950" b="1">
+                <a:solidFill>
+                  <a:srgbClr val="D97706"/>
+                </a:solidFill>
+                <a:latin typeface="Calibri"/>
+              </a:rPr>
+              <a:t>★  [09.09.2026]  Sprint Release I ★
+</a:t>
+            </a:r>
+            <a:r>
+              <a:rPr sz="850" b="0">
+                <a:solidFill>
+                  <a:srgbClr val="334155"/>
+                </a:solidFill>
+                <a:latin typeface="Calibri"/>
+              </a:rPr>
+              <a:t>    Formal submission: EDA diagrams, architecture specifications, and Phase 1 report.</a:t>
+            </a:r>
+          </a:p>
+        </p:txBody>
+      </p:sp>
+      <p:sp>
+        <p:nvSpPr>
+          <p:cNvPr id="10" name="Rounded Rectangle 9"/>
+          <p:cNvSpPr/>
+          <p:nvPr/>
+        </p:nvSpPr>
+        <p:spPr>
+          <a:xfrm>
+            <a:off x="6217920" y="1828800"/>
+            <a:ext cx="5486400" cy="4480560"/>
+          </a:xfrm>
+          <a:prstGeom prst="roundRect">
+            <a:avLst/>
+          </a:prstGeom>
+          <a:solidFill>
+            <a:srgbClr val="FFFFFF"/>
+          </a:solidFill>
+          <a:ln w="15240">
+            <a:solidFill>
+              <a:srgbClr val="E2E8F0"/>
+            </a:solidFill>
+          </a:ln>
+        </p:spPr>
+        <p:style>
+          <a:lnRef idx="1">
+            <a:schemeClr val="accent1"/>
+          </a:lnRef>
+          <a:fillRef idx="3">
+            <a:schemeClr val="accent1"/>
+          </a:fillRef>
+          <a:effectRef idx="2">
+            <a:schemeClr val="accent1"/>
+          </a:effectRef>
+          <a:fontRef idx="minor">
+            <a:schemeClr val="lt1"/>
+          </a:fontRef>
+        </p:style>
+        <p:txBody>
+          <a:bodyPr rtlCol="0" anchor="ctr" wrap="square" lIns="164592" rIns="164592" tIns="137160" bIns="109728"/>
+          <a:lstStyle/>
+          <a:p>
+            <a:pPr algn="ctr">
+              <a:spcAft>
+                <a:spcPts val="400"/>
+              </a:spcAft>
+              <a:defRPr sz="1200" b="1">
+                <a:solidFill>
+                  <a:srgbClr val="2563EB"/>
+                </a:solidFill>
+                <a:latin typeface="Calibri"/>
+              </a:defRPr>
+            </a:pPr>
+            <a:r>
+              <a:t>PHASES 2 &amp; 3: MODEL BUILDING, ENSEMBLE &amp; DEPLOYMENT</a:t>
+            </a:r>
+          </a:p>
+          <a:p>
+            <a:pPr>
+              <a:spcAft>
+                <a:spcPts val="200"/>
+              </a:spcAft>
+            </a:pPr>
+            <a:r>
+              <a:rPr sz="919" b="1">
+                <a:solidFill>
+                  <a:srgbClr val="2563EB"/>
+                </a:solidFill>
+                <a:latin typeface="Calibri"/>
+              </a:rPr>
+              <a:t>→  [Week 6]  Candidate Model Training &amp; Baseline Evaluation
+</a:t>
+            </a:r>
+            <a:r>
+              <a:rPr sz="819" b="0">
+                <a:solidFill>
+                  <a:srgbClr val="334155"/>
+                </a:solidFill>
+                <a:latin typeface="Calibri"/>
+              </a:rPr>
+              <a:t>    Train SVM, Random Forest, Logistic Regression, and Multinomial Naive Bayes.</a:t>
+            </a:r>
+          </a:p>
+          <a:p>
+            <a:pPr>
+              <a:spcAft>
+                <a:spcPts val="200"/>
+              </a:spcAft>
+            </a:pPr>
+            <a:r>
+              <a:rPr sz="919" b="1">
+                <a:solidFill>
+                  <a:srgbClr val="D97706"/>
+                </a:solidFill>
+                <a:latin typeface="Calibri"/>
+              </a:rPr>
+              <a:t>★  [18.09.2026]  Sprint Release II ★
+</a:t>
+            </a:r>
+            <a:r>
+              <a:rPr sz="819" b="0">
+                <a:solidFill>
+                  <a:srgbClr val="334155"/>
+                </a:solidFill>
+                <a:latin typeface="Calibri"/>
+              </a:rPr>
+              <a:t>    Milestone release: Trained baseline classifiers and preliminary metrics.</a:t>
+            </a:r>
+          </a:p>
+          <a:p>
+            <a:pPr>
+              <a:spcAft>
+                <a:spcPts val="200"/>
+              </a:spcAft>
+            </a:pPr>
+            <a:r>
+              <a:rPr sz="919" b="1">
+                <a:solidFill>
+                  <a:srgbClr val="2563EB"/>
+                </a:solidFill>
+                <a:latin typeface="Calibri"/>
+              </a:rPr>
+              <a:t>→  [Week 7]  Hyperparameter Tuning &amp; Model Comparison
+</a:t>
+            </a:r>
+            <a:r>
+              <a:rPr sz="819" b="0">
+                <a:solidFill>
+                  <a:srgbClr val="334155"/>
+                </a:solidFill>
+                <a:latin typeface="Calibri"/>
+              </a:rPr>
+              <a:t>    Systematic tuning and comparative performance profiling across candidate estimators.</a:t>
+            </a:r>
+          </a:p>
+          <a:p>
+            <a:pPr>
+              <a:spcAft>
+                <a:spcPts val="200"/>
+              </a:spcAft>
+            </a:pPr>
+            <a:r>
+              <a:rPr sz="919" b="1">
+                <a:solidFill>
+                  <a:srgbClr val="2563EB"/>
+                </a:solidFill>
+                <a:latin typeface="Calibri"/>
+              </a:rPr>
+              <a:t>→  [Week 8]  Soft Voting Ensemble Implementation
+</a:t>
+            </a:r>
+            <a:r>
+              <a:rPr sz="819" b="0">
+                <a:solidFill>
+                  <a:srgbClr val="334155"/>
+                </a:solidFill>
+                <a:latin typeface="Calibri"/>
+              </a:rPr>
+              <a:t>    Construct soft voting ensemble; aggregate consensus probability distributions.</a:t>
+            </a:r>
+          </a:p>
+          <a:p>
+            <a:pPr>
+              <a:spcAft>
+                <a:spcPts val="200"/>
+              </a:spcAft>
+            </a:pPr>
+            <a:r>
+              <a:rPr sz="919" b="1">
+                <a:solidFill>
+                  <a:srgbClr val="D97706"/>
+                </a:solidFill>
+                <a:latin typeface="Calibri"/>
+              </a:rPr>
+              <a:t>★  [29.09.2026 – 30.09.2026]  Interim Project Presentation ★
+</a:t>
+            </a:r>
+            <a:r>
+              <a:rPr sz="819" b="0">
+                <a:solidFill>
+                  <a:srgbClr val="334155"/>
+                </a:solidFill>
+                <a:latin typeface="Calibri"/>
+              </a:rPr>
+              <a:t>    Progress review and working model demonstration before faculty committee.</a:t>
+            </a:r>
+          </a:p>
+          <a:p>
+            <a:pPr>
+              <a:spcAft>
+                <a:spcPts val="200"/>
+              </a:spcAft>
+            </a:pPr>
+            <a:r>
+              <a:rPr sz="919" b="1">
+                <a:solidFill>
+                  <a:srgbClr val="2563EB"/>
+                </a:solidFill>
+                <a:latin typeface="Calibri"/>
+              </a:rPr>
+              <a:t>→  [Week 9]  Flask Web Integration &amp; Serialization
+</a:t>
+            </a:r>
+            <a:r>
+              <a:rPr sz="819" b="0">
+                <a:solidFill>
+                  <a:srgbClr val="334155"/>
+                </a:solidFill>
+                <a:latin typeface="Calibri"/>
+              </a:rPr>
+              <a:t>    Serialize pipeline with Joblib; build interactive clinician UI for live inference.</a:t>
+            </a:r>
+          </a:p>
+          <a:p>
+            <a:pPr>
+              <a:spcAft>
+                <a:spcPts val="200"/>
+              </a:spcAft>
+            </a:pPr>
+            <a:r>
+              <a:rPr sz="919" b="1">
+                <a:solidFill>
+                  <a:srgbClr val="D97706"/>
+                </a:solidFill>
+                <a:latin typeface="Calibri"/>
+              </a:rPr>
+              <a:t>★  [09.10.2026]  Sprint Release III ★
+</a:t>
+            </a:r>
+            <a:r>
+              <a:rPr sz="819" b="0">
+                <a:solidFill>
+                  <a:srgbClr val="334155"/>
+                </a:solidFill>
+                <a:latin typeface="Calibri"/>
+              </a:rPr>
+              <a:t>    Integrated system release: Flask web application and serialized ensemble.</a:t>
+            </a:r>
+          </a:p>
+          <a:p>
+            <a:pPr>
+              <a:spcAft>
+                <a:spcPts val="200"/>
+              </a:spcAft>
+            </a:pPr>
+            <a:r>
+              <a:rPr sz="919" b="1">
+                <a:solidFill>
+                  <a:srgbClr val="2563EB"/>
+                </a:solidFill>
+                <a:latin typeface="Calibri"/>
+              </a:rPr>
+              <a:t>→  [Weeks 10–11]  Evaluation &amp; System Testing
+</a:t>
+            </a:r>
+            <a:r>
+              <a:rPr sz="819" b="0">
+                <a:solidFill>
+                  <a:srgbClr val="334155"/>
+                </a:solidFill>
+                <a:latin typeface="Calibri"/>
+              </a:rPr>
+              <a:t>    Multi-class metrics (Macro F1, Recall), confusion matrix analysis, and validation.</a:t>
+            </a:r>
+          </a:p>
+          <a:p>
+            <a:pPr>
+              <a:spcAft>
+                <a:spcPts val="200"/>
+              </a:spcAft>
+            </a:pPr>
+            <a:r>
+              <a:rPr sz="919" b="1">
+                <a:solidFill>
+                  <a:srgbClr val="D97706"/>
+                </a:solidFill>
+                <a:latin typeface="Calibri"/>
+              </a:rPr>
+              <a:t>★  [22.10.2026 – 23.10.2026]  Final Project Presentation ★
+</a:t>
+            </a:r>
+            <a:r>
+              <a:rPr sz="819" b="0">
+                <a:solidFill>
+                  <a:srgbClr val="334155"/>
+                </a:solidFill>
+                <a:latin typeface="Calibri"/>
+              </a:rPr>
+              <a:t>    Comprehensive final project defense before the examination board.</a:t>
+            </a:r>
+          </a:p>
+          <a:p>
+            <a:pPr>
+              <a:spcAft>
+                <a:spcPts val="200"/>
+              </a:spcAft>
+            </a:pPr>
+            <a:r>
+              <a:rPr sz="919" b="1">
+                <a:solidFill>
+                  <a:srgbClr val="D97706"/>
+                </a:solidFill>
+                <a:latin typeface="Calibri"/>
+              </a:rPr>
+              <a:t>★  [30.10.2026]  Final Report Submission ★
+</a:t>
+            </a:r>
+            <a:r>
+              <a:rPr sz="819" b="0">
+                <a:solidFill>
+                  <a:srgbClr val="334155"/>
+                </a:solidFill>
+                <a:latin typeface="Calibri"/>
+              </a:rPr>
+              <a:t>    Submission of finalized documentation, technical report, and source code.</a:t>
+            </a:r>
+          </a:p>
+        </p:txBody>
+      </p:sp>
+      <p:sp>
+        <p:nvSpPr>
+          <p:cNvPr id="11" name="Rounded Rectangle 10"/>
+          <p:cNvSpPr/>
+          <p:nvPr/>
+        </p:nvSpPr>
+        <p:spPr>
+          <a:xfrm>
+            <a:off x="457200" y="320040"/>
+            <a:ext cx="4206240" cy="292608"/>
+          </a:xfrm>
+          <a:prstGeom prst="roundRect">
+            <a:avLst/>
+          </a:prstGeom>
+          <a:solidFill>
+            <a:srgbClr val="0E7C86"/>
+          </a:solidFill>
+          <a:ln>
+            <a:noFill/>
+          </a:ln>
+        </p:spPr>
+        <p:style>
+          <a:lnRef idx="1">
+            <a:schemeClr val="accent1"/>
+          </a:lnRef>
+          <a:fillRef idx="3">
+            <a:schemeClr val="accent1"/>
+          </a:fillRef>
+          <a:effectRef idx="2">
+            <a:schemeClr val="accent1"/>
+          </a:effectRef>
+          <a:fontRef idx="minor">
+            <a:schemeClr val="lt1"/>
+          </a:fontRef>
+        </p:style>
+        <p:txBody>
+          <a:bodyPr rtlCol="0" anchor="ctr"/>
+          <a:lstStyle/>
+          <a:p>
+            <a:pPr algn="ctr">
+              <a:defRPr sz="1050" b="1">
+                <a:solidFill>
+                  <a:srgbClr val="FFFFFF"/>
+                </a:solidFill>
+                <a:latin typeface="Calibri"/>
+              </a:defRPr>
+            </a:pPr>
+            <a:r>
+              <a:t>MCA MINI PROJECT | PROJECT TIMELINE</a:t>
+            </a:r>
+          </a:p>
+        </p:txBody>
+      </p:sp>
+      <p:sp>
+        <p:nvSpPr>
+          <p:cNvPr id="12" name="Rounded Rectangle 11"/>
+          <p:cNvSpPr/>
+          <p:nvPr/>
+        </p:nvSpPr>
+        <p:spPr>
+          <a:xfrm>
+            <a:off x="457200" y="1371600"/>
+            <a:ext cx="11247120" cy="365760"/>
+          </a:xfrm>
+          <a:prstGeom prst="roundRect">
+            <a:avLst/>
+          </a:prstGeom>
+          <a:solidFill>
+            <a:srgbClr val="EEF6F6"/>
+          </a:solidFill>
+          <a:ln w="12700">
+            <a:solidFill>
+              <a:srgbClr val="0E7C86"/>
+            </a:solidFill>
+          </a:ln>
+        </p:spPr>
+        <p:style>
+          <a:lnRef idx="1">
+            <a:schemeClr val="accent1"/>
+          </a:lnRef>
+          <a:fillRef idx="3">
+            <a:schemeClr val="accent1"/>
+          </a:fillRef>
+          <a:effectRef idx="2">
+            <a:schemeClr val="accent1"/>
+          </a:effectRef>
+          <a:fontRef idx="minor">
+            <a:schemeClr val="lt1"/>
+          </a:fontRef>
+        </p:style>
+        <p:txBody>
+          <a:bodyPr rtlCol="0" anchor="ctr" tIns="54864" bIns="54864"/>
+          <a:lstStyle/>
+          <a:p>
+            <a:pPr algn="ctr">
+              <a:defRPr sz="1100" b="1">
+                <a:solidFill>
+                  <a:srgbClr val="0E7C86"/>
+                </a:solidFill>
+                <a:latin typeface="Calibri"/>
+              </a:defRPr>
+            </a:pPr>
+            <a:r>
+              <a:t>ACADEMIC TIMELINE &amp; PRESENTATION MILESTONES (SEMESTER 3 MCA MINI PROJECT)</a:t>
+            </a:r>
+          </a:p>
+        </p:txBody>
+      </p:sp>
+    </p:spTree>
+  </p:cSld>
+  <p:clrMapOvr>
+    <a:masterClrMapping/>
+  </p:clrMapOvr>
+</p:sld>
+</file>
+
+<file path=ppt/slides/slide21.xml><?xml version="1.0" encoding="utf-8"?>
 <p:sld xmlns:a="http://schemas.openxmlformats.org/drawingml/2006/main" xmlns:r="http://schemas.openxmlformats.org/officeDocument/2006/relationships" xmlns:p="http://schemas.openxmlformats.org/presentationml/2006/main">
   <p:cSld name="Slide 20">
     <p:bg>
@@ -16417,7 +15775,7 @@
               </a:defRPr>
             </a:pPr>
             <a:r>
-              <a:t>Slide 21 of 21</a:t>
+              <a:t>Slide 20 of 20</a:t>
             </a:r>
           </a:p>
         </p:txBody>
@@ -16905,7 +16263,7 @@
 </p:sld>
 </file>
 
-<file path=ppt/slides/slide21.xml><?xml version="1.0" encoding="utf-8"?>
+<file path=ppt/slides/slide3.xml><?xml version="1.0" encoding="utf-8"?>
 <p:sld xmlns:a="http://schemas.openxmlformats.org/drawingml/2006/main" xmlns:p="http://schemas.openxmlformats.org/presentationml/2006/main" xmlns:r="http://schemas.openxmlformats.org/officeDocument/2006/relationships">
   <p:cSld>
     <p:spTree>
@@ -17923,7 +17281,7 @@
               </a:defRPr>
             </a:pPr>
             <a:r>
-              <a:t>Slide 3 of 21</a:t>
+              <a:t>Slide 3 of 20</a:t>
             </a:r>
           </a:p>
         </p:txBody>
@@ -17936,7 +17294,7 @@
 </p:sld>
 </file>
 
-<file path=ppt/slides/slide3.xml><?xml version="1.0" encoding="utf-8"?>
+<file path=ppt/slides/slide4.xml><?xml version="1.0" encoding="utf-8"?>
 <p:sld xmlns:a="http://schemas.openxmlformats.org/drawingml/2006/main" xmlns:r="http://schemas.openxmlformats.org/officeDocument/2006/relationships" xmlns:p="http://schemas.openxmlformats.org/presentationml/2006/main">
   <p:cSld name="Slide 3">
     <p:bg>
@@ -18164,7 +17522,7 @@
               </a:defRPr>
             </a:pPr>
             <a:r>
-              <a:t>Slide 4 of 21</a:t>
+              <a:t>Slide 4 of 20</a:t>
             </a:r>
           </a:p>
         </p:txBody>
@@ -19332,7 +18690,7 @@
 </p:sld>
 </file>
 
-<file path=ppt/slides/slide4.xml><?xml version="1.0" encoding="utf-8"?>
+<file path=ppt/slides/slide5.xml><?xml version="1.0" encoding="utf-8"?>
 <p:sld xmlns:a="http://schemas.openxmlformats.org/drawingml/2006/main" xmlns:r="http://schemas.openxmlformats.org/officeDocument/2006/relationships" xmlns:p="http://schemas.openxmlformats.org/presentationml/2006/main">
   <p:cSld name="Slide 4">
     <p:bg>
@@ -19568,7 +18926,7 @@
               </a:defRPr>
             </a:pPr>
             <a:r>
-              <a:t>Slide 5 of 21</a:t>
+              <a:t>Slide 5 of 20</a:t>
             </a:r>
           </a:p>
         </p:txBody>
@@ -20999,7 +20357,7 @@
 </p:sld>
 </file>
 
-<file path=ppt/slides/slide5.xml><?xml version="1.0" encoding="utf-8"?>
+<file path=ppt/slides/slide6.xml><?xml version="1.0" encoding="utf-8"?>
 <p:sld xmlns:a="http://schemas.openxmlformats.org/drawingml/2006/main" xmlns:r="http://schemas.openxmlformats.org/officeDocument/2006/relationships" xmlns:p="http://schemas.openxmlformats.org/presentationml/2006/main">
   <p:cSld name="Slide 5">
     <p:bg>
@@ -21235,7 +20593,7 @@
               </a:defRPr>
             </a:pPr>
             <a:r>
-              <a:t>Slide 6 of 21</a:t>
+              <a:t>Slide 6 of 20</a:t>
             </a:r>
           </a:p>
         </p:txBody>
@@ -23164,7 +22522,7 @@
 </p:sld>
 </file>
 
-<file path=ppt/slides/slide6.xml><?xml version="1.0" encoding="utf-8"?>
+<file path=ppt/slides/slide7.xml><?xml version="1.0" encoding="utf-8"?>
 <p:sld xmlns:a="http://schemas.openxmlformats.org/drawingml/2006/main" xmlns:r="http://schemas.openxmlformats.org/officeDocument/2006/relationships" xmlns:p="http://schemas.openxmlformats.org/presentationml/2006/main">
   <p:cSld name="Slide 6">
     <p:bg>
@@ -23400,7 +22758,7 @@
               </a:defRPr>
             </a:pPr>
             <a:r>
-              <a:t>Slide 7 of 21</a:t>
+              <a:t>Slide 7 of 20</a:t>
             </a:r>
           </a:p>
         </p:txBody>
@@ -23821,7 +23179,7 @@
 </p:sld>
 </file>
 
-<file path=ppt/slides/slide7.xml><?xml version="1.0" encoding="utf-8"?>
+<file path=ppt/slides/slide8.xml><?xml version="1.0" encoding="utf-8"?>
 <p:sld xmlns:a="http://schemas.openxmlformats.org/drawingml/2006/main" xmlns:r="http://schemas.openxmlformats.org/officeDocument/2006/relationships" xmlns:p="http://schemas.openxmlformats.org/presentationml/2006/main">
   <p:cSld name="Slide 7">
     <p:bg>
@@ -24057,7 +23415,7 @@
               </a:defRPr>
             </a:pPr>
             <a:r>
-              <a:t>Slide 8 of 21</a:t>
+              <a:t>Slide 8 of 20</a:t>
             </a:r>
           </a:p>
         </p:txBody>
@@ -24561,7 +23919,7 @@
 </p:sld>
 </file>
 
-<file path=ppt/slides/slide8.xml><?xml version="1.0" encoding="utf-8"?>
+<file path=ppt/slides/slide9.xml><?xml version="1.0" encoding="utf-8"?>
 <p:sld xmlns:a="http://schemas.openxmlformats.org/drawingml/2006/main" xmlns:r="http://schemas.openxmlformats.org/officeDocument/2006/relationships" xmlns:p="http://schemas.openxmlformats.org/presentationml/2006/main">
   <p:cSld name="Slide 8">
     <p:bg>
@@ -24797,7 +24155,7 @@
               </a:defRPr>
             </a:pPr>
             <a:r>
-              <a:t>Slide 9 of 21</a:t>
+              <a:t>Slide 9 of 20</a:t>
             </a:r>
           </a:p>
         </p:txBody>
@@ -25202,1365 +24560,6 @@
               <a:t>Variable length and generic high-frequency terms motivate TF-IDF's IDF weighting and L2 normalization to emphasize specialty-specific vocabulary</a:t>
             </a:r>
             <a:endParaRPr lang="en-US" sz="1050" dirty="0"/>
-          </a:p>
-        </p:txBody>
-      </p:sp>
-    </p:spTree>
-  </p:cSld>
-  <p:clrMapOvr>
-    <a:masterClrMapping/>
-  </p:clrMapOvr>
-</p:sld>
-</file>
-
-<file path=ppt/slides/slide9.xml><?xml version="1.0" encoding="utf-8"?>
-<p:sld xmlns:a="http://schemas.openxmlformats.org/drawingml/2006/main" xmlns:r="http://schemas.openxmlformats.org/officeDocument/2006/relationships" xmlns:p="http://schemas.openxmlformats.org/presentationml/2006/main">
-  <p:cSld name="Slide 9">
-    <p:bg>
-      <p:bgPr>
-        <a:solidFill>
-          <a:srgbClr val="F6F8FB"/>
-        </a:solidFill>
-      </p:bgPr>
-    </p:bg>
-    <p:spTree>
-      <p:nvGrpSpPr>
-        <p:cNvPr id="1" name=""/>
-        <p:cNvGrpSpPr/>
-        <p:nvPr/>
-      </p:nvGrpSpPr>
-      <p:grpSpPr>
-        <a:xfrm>
-          <a:off x="0" y="0"/>
-          <a:ext cx="0" cy="0"/>
-          <a:chOff x="0" y="0"/>
-          <a:chExt cx="0" cy="0"/>
-        </a:xfrm>
-      </p:grpSpPr>
-      <p:sp>
-        <p:nvSpPr>
-          <p:cNvPr id="2" name="Shape 0"/>
-          <p:cNvSpPr/>
-          <p:nvPr/>
-        </p:nvSpPr>
-        <p:spPr>
-          <a:xfrm>
-            <a:off x="457200" y="320040"/>
-            <a:ext cx="4206240" cy="292608"/>
-          </a:xfrm>
-          <a:prstGeom prst="roundRect">
-            <a:avLst>
-              <a:gd name="adj" fmla="val 50000"/>
-            </a:avLst>
-          </a:prstGeom>
-          <a:solidFill>
-            <a:srgbClr val="0E7C86"/>
-          </a:solidFill>
-          <a:ln/>
-        </p:spPr>
-        <p:txBody>
-          <a:bodyPr/>
-          <a:p/>
-        </p:txBody>
-      </p:sp>
-      <p:sp>
-        <p:nvSpPr>
-          <p:cNvPr id="3" name="Text 1"/>
-          <p:cNvSpPr txBox="1"/>
-          <p:nvPr/>
-        </p:nvSpPr>
-        <p:spPr>
-          <a:xfrm>
-            <a:off x="457200" y="320040"/>
-            <a:ext cx="4206240" cy="292608"/>
-          </a:xfrm>
-          <a:prstGeom prst="rect">
-            <a:avLst/>
-          </a:prstGeom>
-          <a:noFill/>
-          <a:ln/>
-        </p:spPr>
-        <p:txBody>
-          <a:bodyPr wrap="square" lIns="0" tIns="0" rIns="0" bIns="0" rtlCol="0" anchor="ctr"/>
-          <a:lstStyle/>
-          <a:p>
-            <a:pPr algn="ctr" indent="0" marL="0">
-              <a:buNone/>
-            </a:pPr>
-            <a:r>
-              <a:rPr lang="en-US" sz="1050" b="1" spc="100" kern="0" dirty="0">
-                <a:solidFill>
-                  <a:srgbClr val="FFFFFF"/>
-                </a:solidFill>
-                <a:latin typeface="Calibri" pitchFamily="34" charset="0"/>
-                <a:ea typeface="Calibri" pitchFamily="34" charset="-122"/>
-                <a:cs typeface="Calibri" pitchFamily="34" charset="-120"/>
-              </a:rPr>
-              <a:t>MCA MINI PROJECT | DATA ANALYSIS</a:t>
-            </a:r>
-            <a:endParaRPr lang="en-US" sz="1050" dirty="0"/>
-          </a:p>
-        </p:txBody>
-      </p:sp>
-      <p:sp>
-        <p:nvSpPr>
-          <p:cNvPr id="4" name="Text 2"/>
-          <p:cNvSpPr txBox="1"/>
-          <p:nvPr/>
-        </p:nvSpPr>
-        <p:spPr>
-          <a:xfrm>
-            <a:off x="457200" y="676656"/>
-            <a:ext cx="11247120" cy="658368"/>
-          </a:xfrm>
-          <a:prstGeom prst="rect">
-            <a:avLst/>
-          </a:prstGeom>
-          <a:noFill/>
-          <a:ln/>
-        </p:spPr>
-        <p:txBody>
-          <a:bodyPr wrap="square" lIns="0" tIns="0" rIns="0" bIns="0" rtlCol="0" anchor="t"/>
-          <a:lstStyle/>
-          <a:p>
-            <a:pPr algn="l" indent="0" marL="0">
-              <a:buNone/>
-            </a:pPr>
-            <a:r>
-              <a:rPr lang="en-US" sz="2700" b="1" dirty="0">
-                <a:solidFill>
-                  <a:srgbClr val="0B1F3A"/>
-                </a:solidFill>
-                <a:latin typeface="Cambria" pitchFamily="34" charset="0"/>
-                <a:ea typeface="Cambria" pitchFamily="34" charset="-122"/>
-                <a:cs typeface="Cambria" pitchFamily="34" charset="-120"/>
-              </a:rPr>
-              <a:t>EDA Insights &amp; Conclusions</a:t>
-            </a:r>
-            <a:endParaRPr lang="en-US" sz="2700" dirty="0"/>
-          </a:p>
-        </p:txBody>
-      </p:sp>
-      <p:sp>
-        <p:nvSpPr>
-          <p:cNvPr id="5" name="Text 3"/>
-          <p:cNvSpPr txBox="1"/>
-          <p:nvPr/>
-        </p:nvSpPr>
-        <p:spPr>
-          <a:xfrm>
-            <a:off x="457200" y="6519672"/>
-            <a:ext cx="4206240" cy="274320"/>
-          </a:xfrm>
-          <a:prstGeom prst="rect">
-            <a:avLst/>
-          </a:prstGeom>
-          <a:noFill/>
-          <a:ln/>
-        </p:spPr>
-        <p:txBody>
-          <a:bodyPr wrap="square" lIns="0" tIns="0" rIns="0" bIns="0" rtlCol="0" anchor="ctr"/>
-          <a:lstStyle/>
-          <a:p>
-            <a:pPr algn="l" indent="0" marL="0">
-              <a:buNone/>
-            </a:pPr>
-            <a:r>
-              <a:rPr lang="en-US" sz="900" dirty="0">
-                <a:solidFill>
-                  <a:srgbClr val="5B6472"/>
-                </a:solidFill>
-                <a:latin typeface="Calibri" pitchFamily="34" charset="0"/>
-                <a:ea typeface="Calibri" pitchFamily="34" charset="-122"/>
-                <a:cs typeface="Calibri" pitchFamily="34" charset="-120"/>
-              </a:rPr>
-              <a:t>Department of Computer Applications | MACE</a:t>
-            </a:r>
-            <a:endParaRPr lang="en-US" sz="900" dirty="0"/>
-          </a:p>
-        </p:txBody>
-      </p:sp>
-      <p:sp>
-        <p:nvSpPr>
-          <p:cNvPr id="6" name="Text 4"/>
-          <p:cNvSpPr txBox="1"/>
-          <p:nvPr/>
-        </p:nvSpPr>
-        <p:spPr>
-          <a:xfrm>
-            <a:off x="3657600" y="6519672"/>
-            <a:ext cx="4873752" cy="274320"/>
-          </a:xfrm>
-          <a:prstGeom prst="rect">
-            <a:avLst/>
-          </a:prstGeom>
-          <a:noFill/>
-          <a:ln/>
-        </p:spPr>
-        <p:txBody>
-          <a:bodyPr wrap="square" lIns="0" tIns="0" rIns="0" bIns="0" rtlCol="0" anchor="ctr"/>
-          <a:lstStyle/>
-          <a:p>
-            <a:pPr algn="ctr" indent="0" marL="0">
-              <a:buNone/>
-            </a:pPr>
-            <a:r>
-              <a:rPr lang="en-US" sz="900" dirty="0">
-                <a:solidFill>
-                  <a:srgbClr val="5B6472"/>
-                </a:solidFill>
-                <a:latin typeface="Calibri" pitchFamily="34" charset="0"/>
-                <a:ea typeface="Calibri" pitchFamily="34" charset="-122"/>
-                <a:cs typeface="Calibri" pitchFamily="34" charset="-120"/>
-              </a:rPr>
-              <a:t>Mar Athanasius College of Engineering, Kothamangalam</a:t>
-            </a:r>
-            <a:endParaRPr lang="en-US" sz="900" dirty="0"/>
-          </a:p>
-        </p:txBody>
-      </p:sp>
-      <p:sp>
-        <p:nvSpPr>
-          <p:cNvPr id="7" name="Text 5"/>
-          <p:cNvSpPr txBox="1"/>
-          <p:nvPr/>
-        </p:nvSpPr>
-        <p:spPr>
-          <a:xfrm>
-            <a:off x="9052560" y="6519672"/>
-            <a:ext cx="2679192" cy="274320"/>
-          </a:xfrm>
-          <a:prstGeom prst="rect">
-            <a:avLst/>
-          </a:prstGeom>
-          <a:noFill/>
-          <a:ln/>
-        </p:spPr>
-        <p:txBody>
-          <a:bodyPr wrap="square" lIns="0" tIns="0" rIns="0" bIns="0" rtlCol="0" anchor="ctr"/>
-          <a:lstStyle/>
-          <a:p>
-            <a:pPr>
-              <a:defRPr sz="900">
-                <a:solidFill>
-                  <a:srgbClr val="5B6472"/>
-                </a:solidFill>
-                <a:latin typeface="Calibri"/>
-              </a:defRPr>
-            </a:pPr>
-            <a:r>
-              <a:t>Slide 10 of 21</a:t>
-            </a:r>
-          </a:p>
-        </p:txBody>
-      </p:sp>
-      <p:sp>
-        <p:nvSpPr>
-          <p:cNvPr id="8" name="Shape 6"/>
-          <p:cNvSpPr/>
-          <p:nvPr/>
-        </p:nvSpPr>
-        <p:spPr>
-          <a:xfrm>
-            <a:off x="457200" y="1572768"/>
-            <a:ext cx="3639312" cy="2148840"/>
-          </a:xfrm>
-          <a:prstGeom prst="roundRect">
-            <a:avLst>
-              <a:gd name="adj" fmla="val 3830"/>
-            </a:avLst>
-          </a:prstGeom>
-          <a:solidFill>
-            <a:srgbClr val="FFFFFF"/>
-          </a:solidFill>
-          <a:ln w="12700">
-            <a:solidFill>
-              <a:srgbClr val="E3E8F0"/>
-            </a:solidFill>
-            <a:prstDash val="solid"/>
-          </a:ln>
-          <a:effectLst>
-            <a:outerShdw sx="100000" sy="100000" kx="0" ky="0" algn="bl" rotWithShape="0" blurRad="101600" dist="25400" dir="5400000">
-              <a:srgbClr val="1B2A4A">
-                <a:alpha val="16000"/>
-              </a:srgbClr>
-            </a:outerShdw>
-          </a:effectLst>
-        </p:spPr>
-        <p:txBody>
-          <a:bodyPr/>
-          <a:p/>
-        </p:txBody>
-      </p:sp>
-      <p:sp>
-        <p:nvSpPr>
-          <p:cNvPr id="9" name="Shape 7"/>
-          <p:cNvSpPr/>
-          <p:nvPr/>
-        </p:nvSpPr>
-        <p:spPr>
-          <a:xfrm>
-            <a:off x="640080" y="1755648"/>
-            <a:ext cx="548640" cy="548640"/>
-          </a:xfrm>
-          <a:prstGeom prst="ellipse">
-            <a:avLst/>
-          </a:prstGeom>
-          <a:solidFill>
-            <a:srgbClr val="6C4AB6"/>
-          </a:solidFill>
-          <a:ln/>
-        </p:spPr>
-        <p:txBody>
-          <a:bodyPr/>
-          <a:p/>
-        </p:txBody>
-      </p:sp>
-      <p:sp>
-        <p:nvSpPr>
-          <p:cNvPr id="10" name="Text 8"/>
-          <p:cNvSpPr txBox="1"/>
-          <p:nvPr/>
-        </p:nvSpPr>
-        <p:spPr>
-          <a:xfrm>
-            <a:off x="640080" y="1755648"/>
-            <a:ext cx="548640" cy="548640"/>
-          </a:xfrm>
-          <a:prstGeom prst="rect">
-            <a:avLst/>
-          </a:prstGeom>
-          <a:noFill/>
-          <a:ln/>
-        </p:spPr>
-        <p:txBody>
-          <a:bodyPr wrap="square" lIns="0" tIns="0" rIns="0" bIns="0" rtlCol="0" anchor="ctr"/>
-          <a:lstStyle/>
-          <a:p>
-            <a:pPr algn="ctr" indent="0" marL="0">
-              <a:buNone/>
-            </a:pPr>
-            <a:r>
-              <a:rPr lang="en-US" sz="2000" b="1" dirty="0">
-                <a:solidFill>
-                  <a:srgbClr val="FFFFFF"/>
-                </a:solidFill>
-                <a:latin typeface="Calibri" pitchFamily="34" charset="0"/>
-                <a:ea typeface="Calibri" pitchFamily="34" charset="-122"/>
-                <a:cs typeface="Calibri" pitchFamily="34" charset="-120"/>
-              </a:rPr>
-              <a:t>⚠</a:t>
-            </a:r>
-            <a:endParaRPr lang="en-US" sz="2000" dirty="0"/>
-          </a:p>
-        </p:txBody>
-      </p:sp>
-      <p:sp>
-        <p:nvSpPr>
-          <p:cNvPr id="11" name="Text 9"/>
-          <p:cNvSpPr txBox="1"/>
-          <p:nvPr/>
-        </p:nvSpPr>
-        <p:spPr>
-          <a:xfrm>
-            <a:off x="1280160" y="1773936"/>
-            <a:ext cx="2633472" cy="548640"/>
-          </a:xfrm>
-          <a:prstGeom prst="rect">
-            <a:avLst/>
-          </a:prstGeom>
-          <a:noFill/>
-          <a:ln/>
-        </p:spPr>
-        <p:txBody>
-          <a:bodyPr wrap="square" lIns="0" tIns="0" rIns="0" bIns="0" rtlCol="0" anchor="t"/>
-          <a:lstStyle/>
-          <a:p>
-            <a:pPr indent="0" marL="0">
-              <a:lnSpc>
-                <a:spcPct val="100000"/>
-              </a:lnSpc>
-              <a:buNone/>
-            </a:pPr>
-            <a:r>
-              <a:rPr lang="en-US" sz="1250" b="1" dirty="0">
-                <a:solidFill>
-                  <a:srgbClr val="0B1F3A"/>
-                </a:solidFill>
-                <a:latin typeface="Cambria" pitchFamily="34" charset="0"/>
-                <a:ea typeface="Cambria" pitchFamily="34" charset="-122"/>
-                <a:cs typeface="Cambria" pitchFamily="34" charset="-120"/>
-              </a:rPr>
-              <a:t>Severe Class Imbalance</a:t>
-            </a:r>
-            <a:endParaRPr lang="en-US" sz="1250" dirty="0"/>
-          </a:p>
-        </p:txBody>
-      </p:sp>
-      <p:sp>
-        <p:nvSpPr>
-          <p:cNvPr id="12" name="Text 10"/>
-          <p:cNvSpPr txBox="1"/>
-          <p:nvPr/>
-        </p:nvSpPr>
-        <p:spPr>
-          <a:xfrm>
-            <a:off x="713232" y="2414016"/>
-            <a:ext cx="3127248" cy="1188720"/>
-          </a:xfrm>
-          <a:prstGeom prst="rect">
-            <a:avLst/>
-          </a:prstGeom>
-          <a:noFill/>
-          <a:ln/>
-        </p:spPr>
-        <p:txBody>
-          <a:bodyPr wrap="square" lIns="0" tIns="0" rIns="0" bIns="0" rtlCol="0" anchor="t"/>
-          <a:lstStyle/>
-          <a:p>
-            <a:pPr indent="0" marL="0">
-              <a:lnSpc>
-                <a:spcPct val="115000"/>
-              </a:lnSpc>
-              <a:buNone/>
-            </a:pPr>
-            <a:r>
-              <a:rPr lang="en-US" sz="1030" dirty="0">
-                <a:solidFill>
-                  <a:srgbClr val="16213E"/>
-                </a:solidFill>
-                <a:latin typeface="Calibri" pitchFamily="34" charset="0"/>
-                <a:ea typeface="Calibri" pitchFamily="34" charset="-122"/>
-                <a:cs typeface="Calibri" pitchFamily="34" charset="-120"/>
-              </a:rPr>
-              <a:t>Surgery (1,103) vs. Autopsy (2) — requires stratified splitting &amp; ensemble voting.</a:t>
-            </a:r>
-            <a:endParaRPr lang="en-US" sz="1030" dirty="0"/>
-          </a:p>
-        </p:txBody>
-      </p:sp>
-      <p:sp>
-        <p:nvSpPr>
-          <p:cNvPr id="13" name="Shape 11"/>
-          <p:cNvSpPr/>
-          <p:nvPr/>
-        </p:nvSpPr>
-        <p:spPr>
-          <a:xfrm>
-            <a:off x="4233672" y="1572768"/>
-            <a:ext cx="3639312" cy="2148840"/>
-          </a:xfrm>
-          <a:prstGeom prst="roundRect">
-            <a:avLst>
-              <a:gd name="adj" fmla="val 3830"/>
-            </a:avLst>
-          </a:prstGeom>
-          <a:solidFill>
-            <a:srgbClr val="FFFFFF"/>
-          </a:solidFill>
-          <a:ln w="12700">
-            <a:solidFill>
-              <a:srgbClr val="E3E8F0"/>
-            </a:solidFill>
-            <a:prstDash val="solid"/>
-          </a:ln>
-          <a:effectLst>
-            <a:outerShdw sx="100000" sy="100000" kx="0" ky="0" algn="bl" rotWithShape="0" blurRad="101600" dist="25400" dir="5400000">
-              <a:srgbClr val="1B2A4A">
-                <a:alpha val="16000"/>
-              </a:srgbClr>
-            </a:outerShdw>
-          </a:effectLst>
-        </p:spPr>
-        <p:txBody>
-          <a:bodyPr/>
-          <a:p/>
-        </p:txBody>
-      </p:sp>
-      <p:sp>
-        <p:nvSpPr>
-          <p:cNvPr id="14" name="Shape 12"/>
-          <p:cNvSpPr/>
-          <p:nvPr/>
-        </p:nvSpPr>
-        <p:spPr>
-          <a:xfrm>
-            <a:off x="4416552" y="1755648"/>
-            <a:ext cx="548640" cy="548640"/>
-          </a:xfrm>
-          <a:prstGeom prst="ellipse">
-            <a:avLst/>
-          </a:prstGeom>
-          <a:solidFill>
-            <a:srgbClr val="0E7C86"/>
-          </a:solidFill>
-          <a:ln/>
-        </p:spPr>
-        <p:txBody>
-          <a:bodyPr/>
-          <a:p/>
-        </p:txBody>
-      </p:sp>
-      <p:sp>
-        <p:nvSpPr>
-          <p:cNvPr id="15" name="Text 13"/>
-          <p:cNvSpPr txBox="1"/>
-          <p:nvPr/>
-        </p:nvSpPr>
-        <p:spPr>
-          <a:xfrm>
-            <a:off x="4416552" y="1755648"/>
-            <a:ext cx="548640" cy="548640"/>
-          </a:xfrm>
-          <a:prstGeom prst="rect">
-            <a:avLst/>
-          </a:prstGeom>
-          <a:noFill/>
-          <a:ln/>
-        </p:spPr>
-        <p:txBody>
-          <a:bodyPr wrap="square" lIns="0" tIns="0" rIns="0" bIns="0" rtlCol="0" anchor="ctr"/>
-          <a:lstStyle/>
-          <a:p>
-            <a:pPr algn="ctr" indent="0" marL="0">
-              <a:buNone/>
-            </a:pPr>
-            <a:r>
-              <a:rPr lang="en-US" sz="2000" b="1" dirty="0">
-                <a:solidFill>
-                  <a:srgbClr val="FFFFFF"/>
-                </a:solidFill>
-                <a:latin typeface="Calibri" pitchFamily="34" charset="0"/>
-                <a:ea typeface="Calibri" pitchFamily="34" charset="-122"/>
-                <a:cs typeface="Calibri" pitchFamily="34" charset="-120"/>
-              </a:rPr>
-              <a:t>↔</a:t>
-            </a:r>
-            <a:endParaRPr lang="en-US" sz="2000" dirty="0"/>
-          </a:p>
-        </p:txBody>
-      </p:sp>
-      <p:sp>
-        <p:nvSpPr>
-          <p:cNvPr id="16" name="Text 14"/>
-          <p:cNvSpPr txBox="1"/>
-          <p:nvPr/>
-        </p:nvSpPr>
-        <p:spPr>
-          <a:xfrm>
-            <a:off x="5056632" y="1773936"/>
-            <a:ext cx="2633472" cy="548640"/>
-          </a:xfrm>
-          <a:prstGeom prst="rect">
-            <a:avLst/>
-          </a:prstGeom>
-          <a:noFill/>
-          <a:ln/>
-        </p:spPr>
-        <p:txBody>
-          <a:bodyPr wrap="square" lIns="0" tIns="0" rIns="0" bIns="0" rtlCol="0" anchor="t"/>
-          <a:lstStyle/>
-          <a:p>
-            <a:pPr indent="0" marL="0">
-              <a:lnSpc>
-                <a:spcPct val="100000"/>
-              </a:lnSpc>
-              <a:buNone/>
-            </a:pPr>
-            <a:r>
-              <a:rPr lang="en-US" sz="1250" b="1" dirty="0">
-                <a:solidFill>
-                  <a:srgbClr val="0B1F3A"/>
-                </a:solidFill>
-                <a:latin typeface="Cambria" pitchFamily="34" charset="0"/>
-                <a:ea typeface="Cambria" pitchFamily="34" charset="-122"/>
-                <a:cs typeface="Cambria" pitchFamily="34" charset="-120"/>
-              </a:rPr>
-              <a:t>Variable Text Length</a:t>
-            </a:r>
-            <a:endParaRPr lang="en-US" sz="1250" dirty="0"/>
-          </a:p>
-        </p:txBody>
-      </p:sp>
-      <p:sp>
-        <p:nvSpPr>
-          <p:cNvPr id="17" name="Text 15"/>
-          <p:cNvSpPr txBox="1"/>
-          <p:nvPr/>
-        </p:nvSpPr>
-        <p:spPr>
-          <a:xfrm>
-            <a:off x="4489704" y="2414016"/>
-            <a:ext cx="3127248" cy="1188720"/>
-          </a:xfrm>
-          <a:prstGeom prst="rect">
-            <a:avLst/>
-          </a:prstGeom>
-          <a:noFill/>
-          <a:ln/>
-        </p:spPr>
-        <p:txBody>
-          <a:bodyPr wrap="square" lIns="0" tIns="0" rIns="0" bIns="0" rtlCol="0" anchor="t"/>
-          <a:lstStyle/>
-          <a:p>
-            <a:pPr indent="0" marL="0">
-              <a:lnSpc>
-                <a:spcPct val="115000"/>
-              </a:lnSpc>
-              <a:buNone/>
-            </a:pPr>
-            <a:r>
-              <a:rPr lang="en-US" sz="1030" dirty="0">
-                <a:solidFill>
-                  <a:srgbClr val="16213E"/>
-                </a:solidFill>
-                <a:latin typeface="Calibri" pitchFamily="34" charset="0"/>
-                <a:ea typeface="Calibri" pitchFamily="34" charset="-122"/>
-                <a:cs typeface="Calibri" pitchFamily="34" charset="-120"/>
-              </a:rPr>
-              <a:t>200–3,000 words per report — needs TF-IDF with L2 normalization.</a:t>
-            </a:r>
-            <a:endParaRPr lang="en-US" sz="1030" dirty="0"/>
-          </a:p>
-        </p:txBody>
-      </p:sp>
-      <p:sp>
-        <p:nvSpPr>
-          <p:cNvPr id="18" name="Shape 16"/>
-          <p:cNvSpPr/>
-          <p:nvPr/>
-        </p:nvSpPr>
-        <p:spPr>
-          <a:xfrm>
-            <a:off x="8010144" y="1572768"/>
-            <a:ext cx="3639312" cy="2148840"/>
-          </a:xfrm>
-          <a:prstGeom prst="roundRect">
-            <a:avLst>
-              <a:gd name="adj" fmla="val 3830"/>
-            </a:avLst>
-          </a:prstGeom>
-          <a:solidFill>
-            <a:srgbClr val="FFFFFF"/>
-          </a:solidFill>
-          <a:ln w="12700">
-            <a:solidFill>
-              <a:srgbClr val="E3E8F0"/>
-            </a:solidFill>
-            <a:prstDash val="solid"/>
-          </a:ln>
-          <a:effectLst>
-            <a:outerShdw sx="100000" sy="100000" kx="0" ky="0" algn="bl" rotWithShape="0" blurRad="101600" dist="25400" dir="5400000">
-              <a:srgbClr val="1B2A4A">
-                <a:alpha val="16000"/>
-              </a:srgbClr>
-            </a:outerShdw>
-          </a:effectLst>
-        </p:spPr>
-        <p:txBody>
-          <a:bodyPr/>
-          <a:p/>
-        </p:txBody>
-      </p:sp>
-      <p:sp>
-        <p:nvSpPr>
-          <p:cNvPr id="19" name="Shape 17"/>
-          <p:cNvSpPr/>
-          <p:nvPr/>
-        </p:nvSpPr>
-        <p:spPr>
-          <a:xfrm>
-            <a:off x="8193024" y="1755648"/>
-            <a:ext cx="548640" cy="548640"/>
-          </a:xfrm>
-          <a:prstGeom prst="ellipse">
-            <a:avLst/>
-          </a:prstGeom>
-          <a:solidFill>
-            <a:srgbClr val="13294B"/>
-          </a:solidFill>
-          <a:ln/>
-        </p:spPr>
-        <p:txBody>
-          <a:bodyPr/>
-          <a:p/>
-        </p:txBody>
-      </p:sp>
-      <p:sp>
-        <p:nvSpPr>
-          <p:cNvPr id="20" name="Text 18"/>
-          <p:cNvSpPr txBox="1"/>
-          <p:nvPr/>
-        </p:nvSpPr>
-        <p:spPr>
-          <a:xfrm>
-            <a:off x="8193024" y="1755648"/>
-            <a:ext cx="548640" cy="548640"/>
-          </a:xfrm>
-          <a:prstGeom prst="rect">
-            <a:avLst/>
-          </a:prstGeom>
-          <a:noFill/>
-          <a:ln/>
-        </p:spPr>
-        <p:txBody>
-          <a:bodyPr wrap="square" lIns="0" tIns="0" rIns="0" bIns="0" rtlCol="0" anchor="ctr"/>
-          <a:lstStyle/>
-          <a:p>
-            <a:pPr algn="ctr" indent="0" marL="0">
-              <a:buNone/>
-            </a:pPr>
-            <a:r>
-              <a:rPr lang="en-US" sz="2000" b="1" dirty="0">
-                <a:solidFill>
-                  <a:srgbClr val="FFFFFF"/>
-                </a:solidFill>
-                <a:latin typeface="Calibri" pitchFamily="34" charset="0"/>
-                <a:ea typeface="Calibri" pitchFamily="34" charset="-122"/>
-                <a:cs typeface="Calibri" pitchFamily="34" charset="-120"/>
-              </a:rPr>
-              <a:t>≡</a:t>
-            </a:r>
-            <a:endParaRPr lang="en-US" sz="2000" dirty="0"/>
-          </a:p>
-        </p:txBody>
-      </p:sp>
-      <p:sp>
-        <p:nvSpPr>
-          <p:cNvPr id="21" name="Text 19"/>
-          <p:cNvSpPr txBox="1"/>
-          <p:nvPr/>
-        </p:nvSpPr>
-        <p:spPr>
-          <a:xfrm>
-            <a:off x="8833104" y="1773936"/>
-            <a:ext cx="2633472" cy="548640"/>
-          </a:xfrm>
-          <a:prstGeom prst="rect">
-            <a:avLst/>
-          </a:prstGeom>
-          <a:noFill/>
-          <a:ln/>
-        </p:spPr>
-        <p:txBody>
-          <a:bodyPr wrap="square" lIns="0" tIns="0" rIns="0" bIns="0" rtlCol="0" anchor="t"/>
-          <a:lstStyle/>
-          <a:p>
-            <a:pPr indent="0" marL="0">
-              <a:lnSpc>
-                <a:spcPct val="100000"/>
-              </a:lnSpc>
-              <a:buNone/>
-            </a:pPr>
-            <a:r>
-              <a:rPr lang="en-US" sz="1250" b="1" dirty="0">
-                <a:solidFill>
-                  <a:srgbClr val="0B1F3A"/>
-                </a:solidFill>
-                <a:latin typeface="Cambria" pitchFamily="34" charset="0"/>
-                <a:ea typeface="Cambria" pitchFamily="34" charset="-122"/>
-                <a:cs typeface="Cambria" pitchFamily="34" charset="-120"/>
-              </a:rPr>
-              <a:t>High-Dimensional Text</a:t>
-            </a:r>
-            <a:endParaRPr lang="en-US" sz="1250" dirty="0"/>
-          </a:p>
-        </p:txBody>
-      </p:sp>
-      <p:sp>
-        <p:nvSpPr>
-          <p:cNvPr id="22" name="Text 20"/>
-          <p:cNvSpPr txBox="1"/>
-          <p:nvPr/>
-        </p:nvSpPr>
-        <p:spPr>
-          <a:xfrm>
-            <a:off x="8266176" y="2414016"/>
-            <a:ext cx="3127248" cy="1188720"/>
-          </a:xfrm>
-          <a:prstGeom prst="rect">
-            <a:avLst/>
-          </a:prstGeom>
-          <a:noFill/>
-          <a:ln/>
-        </p:spPr>
-        <p:txBody>
-          <a:bodyPr wrap="square" lIns="0" tIns="0" rIns="0" bIns="0" rtlCol="0" anchor="t"/>
-          <a:lstStyle/>
-          <a:p>
-            <a:pPr indent="0" marL="0">
-              <a:lnSpc>
-                <a:spcPct val="115000"/>
-              </a:lnSpc>
-              <a:buNone/>
-            </a:pPr>
-            <a:r>
-              <a:rPr lang="en-US" sz="1030" dirty="0">
-                <a:solidFill>
-                  <a:srgbClr val="16213E"/>
-                </a:solidFill>
-                <a:latin typeface="Calibri" pitchFamily="34" charset="0"/>
-                <a:ea typeface="Calibri" pitchFamily="34" charset="-122"/>
-                <a:cs typeface="Calibri" pitchFamily="34" charset="-120"/>
-              </a:rPr>
-              <a:t>Large free-text vocabulary → sparse, high-dimensional TF-IDF vectors.</a:t>
-            </a:r>
-            <a:endParaRPr lang="en-US" sz="1030" dirty="0"/>
-          </a:p>
-        </p:txBody>
-      </p:sp>
-      <p:sp>
-        <p:nvSpPr>
-          <p:cNvPr id="23" name="Shape 21"/>
-          <p:cNvSpPr/>
-          <p:nvPr/>
-        </p:nvSpPr>
-        <p:spPr>
-          <a:xfrm>
-            <a:off x="457200" y="3858768"/>
-            <a:ext cx="3639312" cy="2148840"/>
-          </a:xfrm>
-          <a:prstGeom prst="roundRect">
-            <a:avLst>
-              <a:gd name="adj" fmla="val 3830"/>
-            </a:avLst>
-          </a:prstGeom>
-          <a:solidFill>
-            <a:srgbClr val="FFFFFF"/>
-          </a:solidFill>
-          <a:ln w="12700">
-            <a:solidFill>
-              <a:srgbClr val="E3E8F0"/>
-            </a:solidFill>
-            <a:prstDash val="solid"/>
-          </a:ln>
-          <a:effectLst>
-            <a:outerShdw sx="100000" sy="100000" kx="0" ky="0" algn="bl" rotWithShape="0" blurRad="101600" dist="25400" dir="5400000">
-              <a:srgbClr val="1B2A4A">
-                <a:alpha val="16000"/>
-              </a:srgbClr>
-            </a:outerShdw>
-          </a:effectLst>
-        </p:spPr>
-        <p:txBody>
-          <a:bodyPr/>
-          <a:p/>
-        </p:txBody>
-      </p:sp>
-      <p:sp>
-        <p:nvSpPr>
-          <p:cNvPr id="24" name="Shape 22"/>
-          <p:cNvSpPr/>
-          <p:nvPr/>
-        </p:nvSpPr>
-        <p:spPr>
-          <a:xfrm>
-            <a:off x="640080" y="4041648"/>
-            <a:ext cx="548640" cy="548640"/>
-          </a:xfrm>
-          <a:prstGeom prst="ellipse">
-            <a:avLst/>
-          </a:prstGeom>
-          <a:solidFill>
-            <a:srgbClr val="6C4AB6"/>
-          </a:solidFill>
-          <a:ln/>
-        </p:spPr>
-        <p:txBody>
-          <a:bodyPr/>
-          <a:p/>
-        </p:txBody>
-      </p:sp>
-      <p:sp>
-        <p:nvSpPr>
-          <p:cNvPr id="25" name="Text 23"/>
-          <p:cNvSpPr txBox="1"/>
-          <p:nvPr/>
-        </p:nvSpPr>
-        <p:spPr>
-          <a:xfrm>
-            <a:off x="640080" y="4041648"/>
-            <a:ext cx="548640" cy="548640"/>
-          </a:xfrm>
-          <a:prstGeom prst="rect">
-            <a:avLst/>
-          </a:prstGeom>
-          <a:noFill/>
-          <a:ln/>
-        </p:spPr>
-        <p:txBody>
-          <a:bodyPr wrap="square" lIns="0" tIns="0" rIns="0" bIns="0" rtlCol="0" anchor="ctr"/>
-          <a:lstStyle/>
-          <a:p>
-            <a:pPr algn="ctr" indent="0" marL="0">
-              <a:buNone/>
-            </a:pPr>
-            <a:r>
-              <a:rPr lang="en-US" sz="2000" b="1" dirty="0">
-                <a:solidFill>
-                  <a:srgbClr val="FFFFFF"/>
-                </a:solidFill>
-                <a:latin typeface="Calibri" pitchFamily="34" charset="0"/>
-                <a:ea typeface="Calibri" pitchFamily="34" charset="-122"/>
-                <a:cs typeface="Calibri" pitchFamily="34" charset="-120"/>
-              </a:rPr>
-              <a:t>⊘</a:t>
-            </a:r>
-            <a:endParaRPr lang="en-US" sz="2000" dirty="0"/>
-          </a:p>
-        </p:txBody>
-      </p:sp>
-      <p:sp>
-        <p:nvSpPr>
-          <p:cNvPr id="26" name="Text 24"/>
-          <p:cNvSpPr txBox="1"/>
-          <p:nvPr/>
-        </p:nvSpPr>
-        <p:spPr>
-          <a:xfrm>
-            <a:off x="1280160" y="4059936"/>
-            <a:ext cx="2633472" cy="548640"/>
-          </a:xfrm>
-          <a:prstGeom prst="rect">
-            <a:avLst/>
-          </a:prstGeom>
-          <a:noFill/>
-          <a:ln/>
-        </p:spPr>
-        <p:txBody>
-          <a:bodyPr wrap="square" lIns="0" tIns="0" rIns="0" bIns="0" rtlCol="0" anchor="t"/>
-          <a:lstStyle/>
-          <a:p>
-            <a:pPr indent="0" marL="0">
-              <a:lnSpc>
-                <a:spcPct val="100000"/>
-              </a:lnSpc>
-              <a:buNone/>
-            </a:pPr>
-            <a:r>
-              <a:rPr lang="en-US" sz="1250" b="1" dirty="0">
-                <a:solidFill>
-                  <a:srgbClr val="0B1F3A"/>
-                </a:solidFill>
-                <a:latin typeface="Cambria" pitchFamily="34" charset="0"/>
-                <a:ea typeface="Cambria" pitchFamily="34" charset="-122"/>
-                <a:cs typeface="Cambria" pitchFamily="34" charset="-120"/>
-              </a:rPr>
-              <a:t>Generic Vocabulary Noise</a:t>
-            </a:r>
-            <a:endParaRPr lang="en-US" sz="1250" dirty="0"/>
-          </a:p>
-        </p:txBody>
-      </p:sp>
-      <p:sp>
-        <p:nvSpPr>
-          <p:cNvPr id="27" name="Text 25"/>
-          <p:cNvSpPr txBox="1"/>
-          <p:nvPr/>
-        </p:nvSpPr>
-        <p:spPr>
-          <a:xfrm>
-            <a:off x="713232" y="4700016"/>
-            <a:ext cx="3127248" cy="1188720"/>
-          </a:xfrm>
-          <a:prstGeom prst="rect">
-            <a:avLst/>
-          </a:prstGeom>
-          <a:noFill/>
-          <a:ln/>
-        </p:spPr>
-        <p:txBody>
-          <a:bodyPr wrap="square" lIns="0" tIns="0" rIns="0" bIns="0" rtlCol="0" anchor="t"/>
-          <a:lstStyle/>
-          <a:p>
-            <a:pPr indent="0" marL="0">
-              <a:lnSpc>
-                <a:spcPct val="115000"/>
-              </a:lnSpc>
-              <a:buNone/>
-            </a:pPr>
-            <a:r>
-              <a:rPr lang="en-US" sz="1030" dirty="0">
-                <a:solidFill>
-                  <a:srgbClr val="16213E"/>
-                </a:solidFill>
-                <a:latin typeface="Calibri" pitchFamily="34" charset="0"/>
-                <a:ea typeface="Calibri" pitchFamily="34" charset="-122"/>
-                <a:cs typeface="Calibri" pitchFamily="34" charset="-120"/>
-              </a:rPr>
-              <a:t>Common words dominate raw counts → IDF weighting needed to surface specialty terms.</a:t>
-            </a:r>
-            <a:endParaRPr lang="en-US" sz="1030" dirty="0"/>
-          </a:p>
-        </p:txBody>
-      </p:sp>
-      <p:sp>
-        <p:nvSpPr>
-          <p:cNvPr id="28" name="Shape 26"/>
-          <p:cNvSpPr/>
-          <p:nvPr/>
-        </p:nvSpPr>
-        <p:spPr>
-          <a:xfrm>
-            <a:off x="4233672" y="3858768"/>
-            <a:ext cx="3639312" cy="2148840"/>
-          </a:xfrm>
-          <a:prstGeom prst="roundRect">
-            <a:avLst>
-              <a:gd name="adj" fmla="val 3830"/>
-            </a:avLst>
-          </a:prstGeom>
-          <a:solidFill>
-            <a:srgbClr val="FFFFFF"/>
-          </a:solidFill>
-          <a:ln w="12700">
-            <a:solidFill>
-              <a:srgbClr val="E3E8F0"/>
-            </a:solidFill>
-            <a:prstDash val="solid"/>
-          </a:ln>
-          <a:effectLst>
-            <a:outerShdw sx="100000" sy="100000" kx="0" ky="0" algn="bl" rotWithShape="0" blurRad="101600" dist="25400" dir="5400000">
-              <a:srgbClr val="1B2A4A">
-                <a:alpha val="16000"/>
-              </a:srgbClr>
-            </a:outerShdw>
-          </a:effectLst>
-        </p:spPr>
-        <p:txBody>
-          <a:bodyPr/>
-          <a:p/>
-        </p:txBody>
-      </p:sp>
-      <p:sp>
-        <p:nvSpPr>
-          <p:cNvPr id="29" name="Shape 27"/>
-          <p:cNvSpPr/>
-          <p:nvPr/>
-        </p:nvSpPr>
-        <p:spPr>
-          <a:xfrm>
-            <a:off x="4416552" y="4041648"/>
-            <a:ext cx="548640" cy="548640"/>
-          </a:xfrm>
-          <a:prstGeom prst="ellipse">
-            <a:avLst/>
-          </a:prstGeom>
-          <a:solidFill>
-            <a:srgbClr val="0E7C86"/>
-          </a:solidFill>
-          <a:ln/>
-        </p:spPr>
-        <p:txBody>
-          <a:bodyPr/>
-          <a:p/>
-        </p:txBody>
-      </p:sp>
-      <p:sp>
-        <p:nvSpPr>
-          <p:cNvPr id="30" name="Text 28"/>
-          <p:cNvSpPr txBox="1"/>
-          <p:nvPr/>
-        </p:nvSpPr>
-        <p:spPr>
-          <a:xfrm>
-            <a:off x="4416552" y="4041648"/>
-            <a:ext cx="548640" cy="548640"/>
-          </a:xfrm>
-          <a:prstGeom prst="rect">
-            <a:avLst/>
-          </a:prstGeom>
-          <a:noFill/>
-          <a:ln/>
-        </p:spPr>
-        <p:txBody>
-          <a:bodyPr wrap="square" lIns="0" tIns="0" rIns="0" bIns="0" rtlCol="0" anchor="ctr"/>
-          <a:lstStyle/>
-          <a:p>
-            <a:pPr algn="ctr" indent="0" marL="0">
-              <a:buNone/>
-            </a:pPr>
-            <a:r>
-              <a:rPr lang="en-US" sz="2000" b="1" dirty="0">
-                <a:solidFill>
-                  <a:srgbClr val="FFFFFF"/>
-                </a:solidFill>
-                <a:latin typeface="Calibri" pitchFamily="34" charset="0"/>
-                <a:ea typeface="Calibri" pitchFamily="34" charset="-122"/>
-                <a:cs typeface="Calibri" pitchFamily="34" charset="-120"/>
-              </a:rPr>
-              <a:t>✗</a:t>
-            </a:r>
-            <a:endParaRPr lang="en-US" sz="2000" dirty="0"/>
-          </a:p>
-        </p:txBody>
-      </p:sp>
-      <p:sp>
-        <p:nvSpPr>
-          <p:cNvPr id="31" name="Text 29"/>
-          <p:cNvSpPr txBox="1"/>
-          <p:nvPr/>
-        </p:nvSpPr>
-        <p:spPr>
-          <a:xfrm>
-            <a:off x="5056632" y="4059936"/>
-            <a:ext cx="2633472" cy="548640"/>
-          </a:xfrm>
-          <a:prstGeom prst="rect">
-            <a:avLst/>
-          </a:prstGeom>
-          <a:noFill/>
-          <a:ln/>
-        </p:spPr>
-        <p:txBody>
-          <a:bodyPr wrap="square" lIns="0" tIns="0" rIns="0" bIns="0" rtlCol="0" anchor="t"/>
-          <a:lstStyle/>
-          <a:p>
-            <a:pPr indent="0" marL="0">
-              <a:lnSpc>
-                <a:spcPct val="100000"/>
-              </a:lnSpc>
-              <a:buNone/>
-            </a:pPr>
-            <a:r>
-              <a:rPr lang="en-US" sz="1250" b="1" dirty="0">
-                <a:solidFill>
-                  <a:srgbClr val="0B1F3A"/>
-                </a:solidFill>
-                <a:latin typeface="Cambria" pitchFamily="34" charset="0"/>
-                <a:ea typeface="Cambria" pitchFamily="34" charset="-122"/>
-                <a:cs typeface="Cambria" pitchFamily="34" charset="-120"/>
-              </a:rPr>
-              <a:t>Sparse Keywords Field</a:t>
-            </a:r>
-            <a:endParaRPr lang="en-US" sz="1250" dirty="0"/>
-          </a:p>
-        </p:txBody>
-      </p:sp>
-      <p:sp>
-        <p:nvSpPr>
-          <p:cNvPr id="32" name="Text 30"/>
-          <p:cNvSpPr txBox="1"/>
-          <p:nvPr/>
-        </p:nvSpPr>
-        <p:spPr>
-          <a:xfrm>
-            <a:off x="4489704" y="4700016"/>
-            <a:ext cx="3127248" cy="1188720"/>
-          </a:xfrm>
-          <a:prstGeom prst="rect">
-            <a:avLst/>
-          </a:prstGeom>
-          <a:noFill/>
-          <a:ln/>
-        </p:spPr>
-        <p:txBody>
-          <a:bodyPr wrap="square" lIns="0" tIns="0" rIns="0" bIns="0" rtlCol="0" anchor="t"/>
-          <a:lstStyle/>
-          <a:p>
-            <a:pPr indent="0" marL="0">
-              <a:lnSpc>
-                <a:spcPct val="115000"/>
-              </a:lnSpc>
-              <a:buNone/>
-            </a:pPr>
-            <a:r>
-              <a:rPr lang="en-US" sz="1030" dirty="0">
-                <a:solidFill>
-                  <a:srgbClr val="16213E"/>
-                </a:solidFill>
-                <a:latin typeface="Calibri" pitchFamily="34" charset="0"/>
-                <a:ea typeface="Calibri" pitchFamily="34" charset="-122"/>
-                <a:cs typeface="Calibri" pitchFamily="34" charset="-120"/>
-              </a:rPr>
-              <a:t>1,068 missing keyword entries — excluded from the primary feature set.</a:t>
-            </a:r>
-            <a:endParaRPr lang="en-US" sz="1030" dirty="0"/>
-          </a:p>
-        </p:txBody>
-      </p:sp>
-      <p:sp>
-        <p:nvSpPr>
-          <p:cNvPr id="33" name="Shape 31"/>
-          <p:cNvSpPr/>
-          <p:nvPr/>
-        </p:nvSpPr>
-        <p:spPr>
-          <a:xfrm>
-            <a:off x="8010144" y="3858768"/>
-            <a:ext cx="3639312" cy="2148840"/>
-          </a:xfrm>
-          <a:prstGeom prst="roundRect">
-            <a:avLst>
-              <a:gd name="adj" fmla="val 3830"/>
-            </a:avLst>
-          </a:prstGeom>
-          <a:solidFill>
-            <a:srgbClr val="FFFFFF"/>
-          </a:solidFill>
-          <a:ln w="12700">
-            <a:solidFill>
-              <a:srgbClr val="E3E8F0"/>
-            </a:solidFill>
-            <a:prstDash val="solid"/>
-          </a:ln>
-          <a:effectLst>
-            <a:outerShdw sx="100000" sy="100000" kx="0" ky="0" algn="bl" rotWithShape="0" blurRad="101600" dist="25400" dir="5400000">
-              <a:srgbClr val="1B2A4A">
-                <a:alpha val="16000"/>
-              </a:srgbClr>
-            </a:outerShdw>
-          </a:effectLst>
-        </p:spPr>
-        <p:txBody>
-          <a:bodyPr/>
-          <a:p/>
-        </p:txBody>
-      </p:sp>
-      <p:sp>
-        <p:nvSpPr>
-          <p:cNvPr id="34" name="Shape 32"/>
-          <p:cNvSpPr/>
-          <p:nvPr/>
-        </p:nvSpPr>
-        <p:spPr>
-          <a:xfrm>
-            <a:off x="8193024" y="4041648"/>
-            <a:ext cx="548640" cy="548640"/>
-          </a:xfrm>
-          <a:prstGeom prst="ellipse">
-            <a:avLst/>
-          </a:prstGeom>
-          <a:solidFill>
-            <a:srgbClr val="13294B"/>
-          </a:solidFill>
-          <a:ln/>
-        </p:spPr>
-        <p:txBody>
-          <a:bodyPr/>
-          <a:p/>
-        </p:txBody>
-      </p:sp>
-      <p:sp>
-        <p:nvSpPr>
-          <p:cNvPr id="35" name="Text 33"/>
-          <p:cNvSpPr txBox="1"/>
-          <p:nvPr/>
-        </p:nvSpPr>
-        <p:spPr>
-          <a:xfrm>
-            <a:off x="8193024" y="4041648"/>
-            <a:ext cx="548640" cy="548640"/>
-          </a:xfrm>
-          <a:prstGeom prst="rect">
-            <a:avLst/>
-          </a:prstGeom>
-          <a:noFill/>
-          <a:ln/>
-        </p:spPr>
-        <p:txBody>
-          <a:bodyPr wrap="square" lIns="0" tIns="0" rIns="0" bIns="0" rtlCol="0" anchor="ctr"/>
-          <a:lstStyle/>
-          <a:p>
-            <a:pPr algn="ctr" indent="0" marL="0">
-              <a:buNone/>
-            </a:pPr>
-            <a:r>
-              <a:rPr lang="en-US" sz="2000" b="1" dirty="0">
-                <a:solidFill>
-                  <a:srgbClr val="FFFFFF"/>
-                </a:solidFill>
-                <a:latin typeface="Calibri" pitchFamily="34" charset="0"/>
-                <a:ea typeface="Calibri" pitchFamily="34" charset="-122"/>
-                <a:cs typeface="Calibri" pitchFamily="34" charset="-120"/>
-              </a:rPr>
-              <a:t>✓</a:t>
-            </a:r>
-            <a:endParaRPr lang="en-US" sz="2000" dirty="0"/>
-          </a:p>
-        </p:txBody>
-      </p:sp>
-      <p:sp>
-        <p:nvSpPr>
-          <p:cNvPr id="36" name="Text 34"/>
-          <p:cNvSpPr txBox="1"/>
-          <p:nvPr/>
-        </p:nvSpPr>
-        <p:spPr>
-          <a:xfrm>
-            <a:off x="8833104" y="4059936"/>
-            <a:ext cx="2633472" cy="548640"/>
-          </a:xfrm>
-          <a:prstGeom prst="rect">
-            <a:avLst/>
-          </a:prstGeom>
-          <a:noFill/>
-          <a:ln/>
-        </p:spPr>
-        <p:txBody>
-          <a:bodyPr wrap="square" lIns="0" tIns="0" rIns="0" bIns="0" rtlCol="0" anchor="t"/>
-          <a:lstStyle/>
-          <a:p>
-            <a:pPr indent="0" marL="0">
-              <a:lnSpc>
-                <a:spcPct val="100000"/>
-              </a:lnSpc>
-              <a:buNone/>
-            </a:pPr>
-            <a:r>
-              <a:rPr lang="en-US" sz="1250" b="1" dirty="0">
-                <a:solidFill>
-                  <a:srgbClr val="0B1F3A"/>
-                </a:solidFill>
-                <a:latin typeface="Cambria" pitchFamily="34" charset="0"/>
-                <a:ea typeface="Cambria" pitchFamily="34" charset="-122"/>
-                <a:cs typeface="Cambria" pitchFamily="34" charset="-120"/>
-              </a:rPr>
-              <a:t>Multi-Metric Evaluation</a:t>
-            </a:r>
-            <a:endParaRPr lang="en-US" sz="1250" dirty="0"/>
-          </a:p>
-        </p:txBody>
-      </p:sp>
-      <p:sp>
-        <p:nvSpPr>
-          <p:cNvPr id="37" name="Text 35"/>
-          <p:cNvSpPr txBox="1"/>
-          <p:nvPr/>
-        </p:nvSpPr>
-        <p:spPr>
-          <a:xfrm>
-            <a:off x="8266176" y="4700016"/>
-            <a:ext cx="3127248" cy="1188720"/>
-          </a:xfrm>
-          <a:prstGeom prst="rect">
-            <a:avLst/>
-          </a:prstGeom>
-          <a:noFill/>
-          <a:ln/>
-        </p:spPr>
-        <p:txBody>
-          <a:bodyPr wrap="square" lIns="0" tIns="0" rIns="0" bIns="0" rtlCol="0" anchor="t"/>
-          <a:lstStyle/>
-          <a:p>
-            <a:pPr indent="0" marL="0">
-              <a:lnSpc>
-                <a:spcPct val="115000"/>
-              </a:lnSpc>
-              <a:buNone/>
-            </a:pPr>
-            <a:r>
-              <a:rPr lang="en-US" sz="1030" dirty="0">
-                <a:solidFill>
-                  <a:srgbClr val="16213E"/>
-                </a:solidFill>
-                <a:latin typeface="Calibri" pitchFamily="34" charset="0"/>
-                <a:ea typeface="Calibri" pitchFamily="34" charset="-122"/>
-                <a:cs typeface="Calibri" pitchFamily="34" charset="-120"/>
-              </a:rPr>
-              <a:t>Accuracy alone is misleading under imbalance — use precision, recall &amp; F1.</a:t>
-            </a:r>
-            <a:endParaRPr lang="en-US" sz="1030" dirty="0"/>
           </a:p>
         </p:txBody>
       </p:sp>
